--- a/data-eng/decks/w6d4s2.pptx
+++ b/data-eng/decks/w6d4s2.pptx
@@ -16,6 +16,7 @@
     <p:sldId id="264" r:id="rId15"/>
     <p:sldId id="265" r:id="rId16"/>
     <p:sldId id="266" r:id="rId17"/>
+    <p:sldId id="267" r:id="rId18"/>
   </p:sldIdLst>
   <p:sldSz cx="18288000" cy="10287000" type="screen4x3"/>
   <p:notesSz cx="6858000" cy="9144000"/>
@@ -3100,7 +3101,7 @@
       <p:grpSpPr/>
       <p:sp>
         <p:nvSpPr>
-          <p:cNvPr id="2" name="Oval 1"/>
+          <p:cNvPr id="2" name="deckgen:decor"/>
           <p:cNvSpPr/>
           <p:nvPr/>
         </p:nvSpPr>
@@ -3130,7 +3131,7 @@
       </p:sp>
       <p:sp>
         <p:nvSpPr>
-          <p:cNvPr id="3" name="Oval 2"/>
+          <p:cNvPr id="3" name="deckgen:decor"/>
           <p:cNvSpPr/>
           <p:nvPr/>
         </p:nvSpPr>
@@ -3160,7 +3161,7 @@
       </p:sp>
       <p:sp>
         <p:nvSpPr>
-          <p:cNvPr id="4" name="Oval 3"/>
+          <p:cNvPr id="4" name="deckgen:decor"/>
           <p:cNvSpPr/>
           <p:nvPr/>
         </p:nvSpPr>
@@ -3190,7 +3191,7 @@
       </p:sp>
       <p:sp>
         <p:nvSpPr>
-          <p:cNvPr id="5" name="Rectangle 4"/>
+          <p:cNvPr id="5" name="deckgen:decor"/>
           <p:cNvSpPr/>
           <p:nvPr/>
         </p:nvSpPr>
@@ -3220,7 +3221,7 @@
       </p:sp>
       <p:sp>
         <p:nvSpPr>
-          <p:cNvPr id="6" name="Oval 5"/>
+          <p:cNvPr id="6" name="deckgen:decor"/>
           <p:cNvSpPr/>
           <p:nvPr/>
         </p:nvSpPr>
@@ -3250,7 +3251,7 @@
       </p:sp>
       <p:sp>
         <p:nvSpPr>
-          <p:cNvPr id="7" name="Oval 6"/>
+          <p:cNvPr id="7" name="deckgen:decor"/>
           <p:cNvSpPr/>
           <p:nvPr/>
         </p:nvSpPr>
@@ -3280,7 +3281,7 @@
       </p:sp>
       <p:sp>
         <p:nvSpPr>
-          <p:cNvPr id="8" name="Oval 7"/>
+          <p:cNvPr id="8" name="deckgen:decor"/>
           <p:cNvSpPr/>
           <p:nvPr/>
         </p:nvSpPr>
@@ -3310,7 +3311,7 @@
       </p:sp>
       <p:sp>
         <p:nvSpPr>
-          <p:cNvPr id="9" name="Oval 8"/>
+          <p:cNvPr id="9" name="deckgen:decor"/>
           <p:cNvSpPr/>
           <p:nvPr/>
         </p:nvSpPr>
@@ -3340,7 +3341,7 @@
       </p:sp>
       <p:sp>
         <p:nvSpPr>
-          <p:cNvPr id="10" name="Rectangle 9"/>
+          <p:cNvPr id="10" name="deckgen:decor"/>
           <p:cNvSpPr/>
           <p:nvPr/>
         </p:nvSpPr>
@@ -3600,7 +3601,7 @@
       <p:grpSpPr/>
       <p:sp>
         <p:nvSpPr>
-          <p:cNvPr id="2" name="Oval 1"/>
+          <p:cNvPr id="2" name="deckgen:decor"/>
           <p:cNvSpPr/>
           <p:nvPr/>
         </p:nvSpPr>
@@ -3630,7 +3631,7 @@
       </p:sp>
       <p:sp>
         <p:nvSpPr>
-          <p:cNvPr id="3" name="Oval 2"/>
+          <p:cNvPr id="3" name="deckgen:decor"/>
           <p:cNvSpPr/>
           <p:nvPr/>
         </p:nvSpPr>
@@ -3660,7 +3661,7 @@
       </p:sp>
       <p:sp>
         <p:nvSpPr>
-          <p:cNvPr id="4" name="Oval 3"/>
+          <p:cNvPr id="4" name="deckgen:decor"/>
           <p:cNvSpPr/>
           <p:nvPr/>
         </p:nvSpPr>
@@ -3724,7 +3725,7 @@
                 <a:ea typeface="Pretendard"/>
                 <a:cs typeface="Pretendard"/>
               </a:rPr>
-              <a:t>확인 포인트</a:t>
+              <a:t>6단계 — 일부러 빼 보기</a:t>
             </a:r>
           </a:p>
         </p:txBody>
@@ -3765,7 +3766,7 @@
                 <a:ea typeface="Pretendard"/>
                 <a:cs typeface="Pretendard"/>
               </a:rPr>
-              <a:t>이 2.5시간이 끝날 때 확인할 것</a:t>
+              <a:t>툼스톤 처리 두 줄을 빼면 멈춘다</a:t>
             </a:r>
           </a:p>
         </p:txBody>
@@ -3802,18 +3803,100 @@
       </p:sp>
       <p:sp>
         <p:nvSpPr>
-          <p:cNvPr id="8" name="Rounded Rectangle 7"/>
-          <p:cNvSpPr/>
-          <p:nvPr/>
-        </p:nvSpPr>
-        <p:spPr>
-          <a:xfrm>
-            <a:off x="1143000" y="2867025"/>
-            <a:ext cx="16002000" cy="742950"/>
+          <p:cNvPr id="8" name="TextBox 7"/>
+          <p:cNvSpPr txBox="1"/>
+          <p:nvPr/>
+        </p:nvSpPr>
+        <p:spPr>
+          <a:xfrm>
+            <a:off x="1143000" y="2857500"/>
+            <a:ext cx="7372350" cy="533400"/>
+          </a:xfrm>
+          <a:prstGeom prst="rect">
+            <a:avLst/>
+          </a:prstGeom>
+          <a:noFill/>
+        </p:spPr>
+        <p:txBody>
+          <a:bodyPr wrap="square" lIns="0" rIns="0" tIns="0" bIns="0" anchor="t">
+            <a:spAutoFit/>
+          </a:bodyPr>
+          <a:lstStyle/>
+          <a:p>
+            <a:pPr algn="l">
+              <a:lnSpc>
+                <a:spcPct val="110000"/>
+              </a:lnSpc>
+            </a:pPr>
+            <a:r>
+              <a:rPr sz="3150" b="1">
+                <a:solidFill>
+                  <a:srgbClr val="0D2B5E"/>
+                </a:solidFill>
+                <a:latin typeface="Pretendard"/>
+                <a:ea typeface="Pretendard"/>
+                <a:cs typeface="Pretendard"/>
+              </a:rPr>
+              <a:t>빼면</a:t>
+            </a:r>
+          </a:p>
+        </p:txBody>
+      </p:sp>
+      <p:sp>
+        <p:nvSpPr>
+          <p:cNvPr id="9" name="TextBox 8"/>
+          <p:cNvSpPr txBox="1"/>
+          <p:nvPr/>
+        </p:nvSpPr>
+        <p:spPr>
+          <a:xfrm>
+            <a:off x="1143000" y="3467100"/>
+            <a:ext cx="7372350" cy="876300"/>
+          </a:xfrm>
+          <a:prstGeom prst="rect">
+            <a:avLst/>
+          </a:prstGeom>
+          <a:noFill/>
+        </p:spPr>
+        <p:txBody>
+          <a:bodyPr wrap="square" lIns="0" rIns="0" tIns="0" bIns="0" anchor="t">
+            <a:spAutoFit/>
+          </a:bodyPr>
+          <a:lstStyle/>
+          <a:p>
+            <a:pPr algn="l">
+              <a:lnSpc>
+                <a:spcPct val="146000"/>
+              </a:lnSpc>
+            </a:pPr>
+            <a:r>
+              <a:rPr sz="2250" b="0">
+                <a:solidFill>
+                  <a:srgbClr val="3D3D3D"/>
+                </a:solidFill>
+                <a:latin typeface="Pretendard"/>
+                <a:ea typeface="Pretendard"/>
+                <a:cs typeface="Pretendard"/>
+              </a:rPr>
+              <a:t>AttributeError: 'NoneType' … 'decode'</a:t>
+            </a:r>
+          </a:p>
+        </p:txBody>
+      </p:sp>
+      <p:sp>
+        <p:nvSpPr>
+          <p:cNvPr id="10" name="Rounded Rectangle 9"/>
+          <p:cNvSpPr/>
+          <p:nvPr/>
+        </p:nvSpPr>
+        <p:spPr>
+          <a:xfrm>
+            <a:off x="1143000" y="4610100"/>
+            <a:ext cx="7372350" cy="2857500"/>
           </a:xfrm>
           <a:prstGeom prst="roundRect">
             <a:avLst>
-              <a:gd name="adj" fmla="val 6410"/>
+              <a:gd name="adj" fmla="val 1666"/>
             </a:avLst>
           </a:prstGeom>
           <a:solidFill>
@@ -3836,20 +3919,20 @@
       </p:sp>
       <p:sp>
         <p:nvSpPr>
-          <p:cNvPr id="9" name="Oval 8"/>
-          <p:cNvSpPr/>
-          <p:nvPr/>
-        </p:nvSpPr>
-        <p:spPr>
-          <a:xfrm>
-            <a:off x="1390650" y="2971800"/>
-            <a:ext cx="533400" cy="533400"/>
+          <p:cNvPr id="11" name="Oval 10"/>
+          <p:cNvSpPr/>
+          <p:nvPr/>
+        </p:nvSpPr>
+        <p:spPr>
+          <a:xfrm>
+            <a:off x="1447800" y="5016817"/>
+            <a:ext cx="97155" cy="97155"/>
           </a:xfrm>
           <a:prstGeom prst="ellipse">
             <a:avLst/>
           </a:prstGeom>
           <a:solidFill>
-            <a:srgbClr val="0D2B5E"/>
+            <a:srgbClr val="1E5BC6"/>
           </a:solidFill>
           <a:ln>
             <a:noFill/>
@@ -3866,14 +3949,197 @@
       </p:sp>
       <p:sp>
         <p:nvSpPr>
-          <p:cNvPr id="10" name="TextBox 9"/>
-          <p:cNvSpPr txBox="1"/>
-          <p:nvPr/>
-        </p:nvSpPr>
-        <p:spPr>
-          <a:xfrm>
-            <a:off x="1390650" y="3095625"/>
-            <a:ext cx="533400" cy="323850"/>
+          <p:cNvPr id="12" name="TextBox 11"/>
+          <p:cNvSpPr txBox="1"/>
+          <p:nvPr/>
+        </p:nvSpPr>
+        <p:spPr>
+          <a:xfrm>
+            <a:off x="1633538" y="4838700"/>
+            <a:ext cx="6634162" cy="453390"/>
+          </a:xfrm>
+          <a:prstGeom prst="rect">
+            <a:avLst/>
+          </a:prstGeom>
+          <a:noFill/>
+        </p:spPr>
+        <p:txBody>
+          <a:bodyPr wrap="square" lIns="0" rIns="0" tIns="0" bIns="0" anchor="ctr">
+            <a:spAutoFit/>
+          </a:bodyPr>
+          <a:lstStyle/>
+          <a:p>
+            <a:pPr algn="l">
+              <a:lnSpc>
+                <a:spcPct val="120000"/>
+              </a:lnSpc>
+            </a:pPr>
+            <a:r>
+              <a:rPr sz="1575" b="0">
+                <a:solidFill>
+                  <a:srgbClr val="3D3D3D"/>
+                </a:solidFill>
+                <a:latin typeface="Pretendard"/>
+                <a:ea typeface="Pretendard"/>
+                <a:cs typeface="Pretendard"/>
+              </a:rPr>
+              <a:t>DELETE 뒤 값이 없는 메시지가 온다</a:t>
+            </a:r>
+          </a:p>
+        </p:txBody>
+      </p:sp>
+      <p:sp>
+        <p:nvSpPr>
+          <p:cNvPr id="13" name="Oval 12"/>
+          <p:cNvSpPr/>
+          <p:nvPr/>
+        </p:nvSpPr>
+        <p:spPr>
+          <a:xfrm>
+            <a:off x="1447800" y="5527358"/>
+            <a:ext cx="97155" cy="97155"/>
+          </a:xfrm>
+          <a:prstGeom prst="ellipse">
+            <a:avLst/>
+          </a:prstGeom>
+          <a:solidFill>
+            <a:srgbClr val="1E5BC6"/>
+          </a:solidFill>
+          <a:ln>
+            <a:noFill/>
+          </a:ln>
+          <a:effectLst/>
+        </p:spPr>
+        <p:txBody>
+          <a:bodyPr rtlCol="0" anchor="ctr" wrap="square"/>
+          <a:lstStyle/>
+          <a:p>
+            <a:pPr algn="ctr"/>
+          </a:p>
+        </p:txBody>
+      </p:sp>
+      <p:sp>
+        <p:nvSpPr>
+          <p:cNvPr id="14" name="TextBox 13"/>
+          <p:cNvSpPr txBox="1"/>
+          <p:nvPr/>
+        </p:nvSpPr>
+        <p:spPr>
+          <a:xfrm>
+            <a:off x="1633538" y="5349240"/>
+            <a:ext cx="6634162" cy="453390"/>
+          </a:xfrm>
+          <a:prstGeom prst="rect">
+            <a:avLst/>
+          </a:prstGeom>
+          <a:noFill/>
+        </p:spPr>
+        <p:txBody>
+          <a:bodyPr wrap="square" lIns="0" rIns="0" tIns="0" bIns="0" anchor="ctr">
+            <a:spAutoFit/>
+          </a:bodyPr>
+          <a:lstStyle/>
+          <a:p>
+            <a:pPr algn="l">
+              <a:lnSpc>
+                <a:spcPct val="120000"/>
+              </a:lnSpc>
+            </a:pPr>
+            <a:r>
+              <a:rPr sz="1575" b="0">
+                <a:solidFill>
+                  <a:srgbClr val="3D3D3D"/>
+                </a:solidFill>
+                <a:latin typeface="Pretendard"/>
+                <a:ea typeface="Pretendard"/>
+                <a:cs typeface="Pretendard"/>
+              </a:rPr>
+              <a:t>msg.value() 가 None 이라 decode 에서 멈춘다</a:t>
+            </a:r>
+          </a:p>
+        </p:txBody>
+      </p:sp>
+      <p:sp>
+        <p:nvSpPr>
+          <p:cNvPr id="15" name="Oval 14"/>
+          <p:cNvSpPr/>
+          <p:nvPr/>
+        </p:nvSpPr>
+        <p:spPr>
+          <a:xfrm>
+            <a:off x="1447800" y="6037898"/>
+            <a:ext cx="97155" cy="97155"/>
+          </a:xfrm>
+          <a:prstGeom prst="ellipse">
+            <a:avLst/>
+          </a:prstGeom>
+          <a:solidFill>
+            <a:srgbClr val="1E5BC6"/>
+          </a:solidFill>
+          <a:ln>
+            <a:noFill/>
+          </a:ln>
+          <a:effectLst/>
+        </p:spPr>
+        <p:txBody>
+          <a:bodyPr rtlCol="0" anchor="ctr" wrap="square"/>
+          <a:lstStyle/>
+          <a:p>
+            <a:pPr algn="ctr"/>
+          </a:p>
+        </p:txBody>
+      </p:sp>
+      <p:sp>
+        <p:nvSpPr>
+          <p:cNvPr id="16" name="TextBox 15"/>
+          <p:cNvSpPr txBox="1"/>
+          <p:nvPr/>
+        </p:nvSpPr>
+        <p:spPr>
+          <a:xfrm>
+            <a:off x="1633538" y="5859780"/>
+            <a:ext cx="6634162" cy="453390"/>
+          </a:xfrm>
+          <a:prstGeom prst="rect">
+            <a:avLst/>
+          </a:prstGeom>
+          <a:noFill/>
+        </p:spPr>
+        <p:txBody>
+          <a:bodyPr wrap="square" lIns="0" rIns="0" tIns="0" bIns="0" anchor="ctr">
+            <a:spAutoFit/>
+          </a:bodyPr>
+          <a:lstStyle/>
+          <a:p>
+            <a:pPr algn="l">
+              <a:lnSpc>
+                <a:spcPct val="120000"/>
+              </a:lnSpc>
+            </a:pPr>
+            <a:r>
+              <a:rPr sz="1575" b="0">
+                <a:solidFill>
+                  <a:srgbClr val="3D3D3D"/>
+                </a:solidFill>
+                <a:latin typeface="Pretendard"/>
+                <a:ea typeface="Pretendard"/>
+                <a:cs typeface="Pretendard"/>
+              </a:rPr>
+              <a:t>받는 쪽은 빈 메시지도 견뎌야 한다</a:t>
+            </a:r>
+          </a:p>
+        </p:txBody>
+      </p:sp>
+      <p:sp>
+        <p:nvSpPr>
+          <p:cNvPr id="17" name="TextBox 16"/>
+          <p:cNvSpPr txBox="1"/>
+          <p:nvPr/>
+        </p:nvSpPr>
+        <p:spPr>
+          <a:xfrm>
+            <a:off x="9772650" y="2857500"/>
+            <a:ext cx="7372350" cy="533400"/>
           </a:xfrm>
           <a:prstGeom prst="rect">
             <a:avLst/>
@@ -3886,54 +4152,13 @@
           </a:bodyPr>
           <a:lstStyle/>
           <a:p>
-            <a:pPr algn="ctr">
-              <a:lnSpc>
-                <a:spcPct val="100000"/>
-              </a:lnSpc>
-            </a:pPr>
-            <a:r>
-              <a:rPr sz="2100" b="1">
-                <a:solidFill>
-                  <a:srgbClr val="FFFFFF"/>
-                </a:solidFill>
-                <a:latin typeface="Pretendard"/>
-                <a:ea typeface="Pretendard"/>
-                <a:cs typeface="Pretendard"/>
-              </a:rPr>
-              <a:t>1</a:t>
-            </a:r>
-          </a:p>
-        </p:txBody>
-      </p:sp>
-      <p:sp>
-        <p:nvSpPr>
-          <p:cNvPr id="11" name="TextBox 10"/>
-          <p:cNvSpPr txBox="1"/>
-          <p:nvPr/>
-        </p:nvSpPr>
-        <p:spPr>
-          <a:xfrm>
-            <a:off x="2190750" y="2867025"/>
-            <a:ext cx="14573250" cy="742950"/>
-          </a:xfrm>
-          <a:prstGeom prst="rect">
-            <a:avLst/>
-          </a:prstGeom>
-          <a:noFill/>
-        </p:spPr>
-        <p:txBody>
-          <a:bodyPr wrap="square" lIns="0" rIns="0" tIns="0" bIns="0" anchor="ctr">
-            <a:spAutoFit/>
-          </a:bodyPr>
-          <a:lstStyle/>
-          <a:p>
             <a:pPr algn="l">
               <a:lnSpc>
-                <a:spcPct val="100000"/>
-              </a:lnSpc>
-            </a:pPr>
-            <a:r>
-              <a:rPr sz="2100" b="1">
+                <a:spcPct val="110000"/>
+              </a:lnSpc>
+            </a:pPr>
+            <a:r>
+              <a:rPr sz="3150" b="1">
                 <a:solidFill>
                   <a:srgbClr val="0D2B5E"/>
                 </a:solidFill>
@@ -3941,25 +4166,66 @@
                 <a:ea typeface="Pretendard"/>
                 <a:cs typeface="Pretendard"/>
               </a:rPr>
-              <a:t>log_bin=ON · binlog_format=ROW · curl 8083 에 버전 JSON</a:t>
-            </a:r>
-          </a:p>
-        </p:txBody>
-      </p:sp>
-      <p:sp>
-        <p:nvSpPr>
-          <p:cNvPr id="12" name="Rounded Rectangle 11"/>
-          <p:cNvSpPr/>
-          <p:nvPr/>
-        </p:nvSpPr>
-        <p:spPr>
-          <a:xfrm>
-            <a:off x="1143000" y="3724275"/>
-            <a:ext cx="16002000" cy="742950"/>
+              <a:t>처리하면</a:t>
+            </a:r>
+          </a:p>
+        </p:txBody>
+      </p:sp>
+      <p:sp>
+        <p:nvSpPr>
+          <p:cNvPr id="18" name="TextBox 17"/>
+          <p:cNvSpPr txBox="1"/>
+          <p:nvPr/>
+        </p:nvSpPr>
+        <p:spPr>
+          <a:xfrm>
+            <a:off x="9772650" y="3467100"/>
+            <a:ext cx="7372350" cy="876300"/>
+          </a:xfrm>
+          <a:prstGeom prst="rect">
+            <a:avLst/>
+          </a:prstGeom>
+          <a:noFill/>
+        </p:spPr>
+        <p:txBody>
+          <a:bodyPr wrap="square" lIns="0" rIns="0" tIns="0" bIns="0" anchor="t">
+            <a:spAutoFit/>
+          </a:bodyPr>
+          <a:lstStyle/>
+          <a:p>
+            <a:pPr algn="l">
+              <a:lnSpc>
+                <a:spcPct val="146000"/>
+              </a:lnSpc>
+            </a:pPr>
+            <a:r>
+              <a:rPr sz="2250" b="0">
+                <a:solidFill>
+                  <a:srgbClr val="3D3D3D"/>
+                </a:solidFill>
+                <a:latin typeface="Pretendard"/>
+                <a:ea typeface="Pretendard"/>
+                <a:cs typeface="Pretendard"/>
+              </a:rPr>
+              <a:t>[툼스톤] id=2 — 값이 없는 메시지</a:t>
+            </a:r>
+          </a:p>
+        </p:txBody>
+      </p:sp>
+      <p:sp>
+        <p:nvSpPr>
+          <p:cNvPr id="19" name="Rounded Rectangle 18"/>
+          <p:cNvSpPr/>
+          <p:nvPr/>
+        </p:nvSpPr>
+        <p:spPr>
+          <a:xfrm>
+            <a:off x="9772650" y="4610100"/>
+            <a:ext cx="7372350" cy="2857500"/>
           </a:xfrm>
           <a:prstGeom prst="roundRect">
             <a:avLst>
-              <a:gd name="adj" fmla="val 6410"/>
+              <a:gd name="adj" fmla="val 1666"/>
             </a:avLst>
           </a:prstGeom>
           <a:solidFill>
@@ -3982,20 +4248,20 @@
       </p:sp>
       <p:sp>
         <p:nvSpPr>
-          <p:cNvPr id="13" name="Oval 12"/>
-          <p:cNvSpPr/>
-          <p:nvPr/>
-        </p:nvSpPr>
-        <p:spPr>
-          <a:xfrm>
-            <a:off x="1390650" y="3829050"/>
-            <a:ext cx="533400" cy="533400"/>
+          <p:cNvPr id="20" name="Oval 19"/>
+          <p:cNvSpPr/>
+          <p:nvPr/>
+        </p:nvSpPr>
+        <p:spPr>
+          <a:xfrm>
+            <a:off x="10077450" y="5016817"/>
+            <a:ext cx="97155" cy="97155"/>
           </a:xfrm>
           <a:prstGeom prst="ellipse">
             <a:avLst/>
           </a:prstGeom>
           <a:solidFill>
-            <a:srgbClr val="0D2B5E"/>
+            <a:srgbClr val="1E5BC6"/>
           </a:solidFill>
           <a:ln>
             <a:noFill/>
@@ -4012,55 +4278,14 @@
       </p:sp>
       <p:sp>
         <p:nvSpPr>
-          <p:cNvPr id="14" name="TextBox 13"/>
-          <p:cNvSpPr txBox="1"/>
-          <p:nvPr/>
-        </p:nvSpPr>
-        <p:spPr>
-          <a:xfrm>
-            <a:off x="1390650" y="3952875"/>
-            <a:ext cx="533400" cy="323850"/>
-          </a:xfrm>
-          <a:prstGeom prst="rect">
-            <a:avLst/>
-          </a:prstGeom>
-          <a:noFill/>
-        </p:spPr>
-        <p:txBody>
-          <a:bodyPr wrap="square" lIns="0" rIns="0" tIns="0" bIns="0" anchor="t">
-            <a:spAutoFit/>
-          </a:bodyPr>
-          <a:lstStyle/>
-          <a:p>
-            <a:pPr algn="ctr">
-              <a:lnSpc>
-                <a:spcPct val="100000"/>
-              </a:lnSpc>
-            </a:pPr>
-            <a:r>
-              <a:rPr sz="2100" b="1">
-                <a:solidFill>
-                  <a:srgbClr val="FFFFFF"/>
-                </a:solidFill>
-                <a:latin typeface="Pretendard"/>
-                <a:ea typeface="Pretendard"/>
-                <a:cs typeface="Pretendard"/>
-              </a:rPr>
-              <a:t>2</a:t>
-            </a:r>
-          </a:p>
-        </p:txBody>
-      </p:sp>
-      <p:sp>
-        <p:nvSpPr>
-          <p:cNvPr id="15" name="TextBox 14"/>
-          <p:cNvSpPr txBox="1"/>
-          <p:nvPr/>
-        </p:nvSpPr>
-        <p:spPr>
-          <a:xfrm>
-            <a:off x="2190750" y="3724275"/>
-            <a:ext cx="14573250" cy="742950"/>
+          <p:cNvPr id="21" name="TextBox 20"/>
+          <p:cNvSpPr txBox="1"/>
+          <p:nvPr/>
+        </p:nvSpPr>
+        <p:spPr>
+          <a:xfrm>
+            <a:off x="10263188" y="4838700"/>
+            <a:ext cx="6634162" cy="453390"/>
           </a:xfrm>
           <a:prstGeom prst="rect">
             <a:avLst/>
@@ -4075,73 +4300,39 @@
           <a:p>
             <a:pPr algn="l">
               <a:lnSpc>
-                <a:spcPct val="100000"/>
-              </a:lnSpc>
-            </a:pPr>
-            <a:r>
-              <a:rPr sz="2100" b="1">
-                <a:solidFill>
-                  <a:srgbClr val="0D2B5E"/>
-                </a:solidFill>
-                <a:latin typeface="Pretendard"/>
-                <a:ea typeface="Pretendard"/>
-                <a:cs typeface="Pretendard"/>
-              </a:rPr>
-              <a:t>SELECT * FROM orders 에 2행</a:t>
-            </a:r>
-          </a:p>
-        </p:txBody>
-      </p:sp>
-      <p:sp>
-        <p:nvSpPr>
-          <p:cNvPr id="16" name="Rounded Rectangle 15"/>
-          <p:cNvSpPr/>
-          <p:nvPr/>
-        </p:nvSpPr>
-        <p:spPr>
-          <a:xfrm>
-            <a:off x="1143000" y="4581525"/>
-            <a:ext cx="16002000" cy="742950"/>
-          </a:xfrm>
-          <a:prstGeom prst="roundRect">
-            <a:avLst>
-              <a:gd name="adj" fmla="val 6410"/>
-            </a:avLst>
-          </a:prstGeom>
-          <a:solidFill>
-            <a:srgbClr val="FAFBFD"/>
-          </a:solidFill>
-          <a:ln w="9525">
-            <a:solidFill>
-              <a:srgbClr val="DCE1E8"/>
-            </a:solidFill>
-          </a:ln>
-          <a:effectLst/>
-        </p:spPr>
-        <p:txBody>
-          <a:bodyPr rtlCol="0" anchor="ctr" wrap="square"/>
-          <a:lstStyle/>
-          <a:p>
-            <a:pPr algn="ctr"/>
-          </a:p>
-        </p:txBody>
-      </p:sp>
-      <p:sp>
-        <p:nvSpPr>
-          <p:cNvPr id="17" name="Oval 16"/>
-          <p:cNvSpPr/>
-          <p:nvPr/>
-        </p:nvSpPr>
-        <p:spPr>
-          <a:xfrm>
-            <a:off x="1390650" y="4686300"/>
-            <a:ext cx="533400" cy="533400"/>
+                <a:spcPct val="120000"/>
+              </a:lnSpc>
+            </a:pPr>
+            <a:r>
+              <a:rPr sz="1575" b="0">
+                <a:solidFill>
+                  <a:srgbClr val="3D3D3D"/>
+                </a:solidFill>
+                <a:latin typeface="Pretendard"/>
+                <a:ea typeface="Pretendard"/>
+                <a:cs typeface="Pretendard"/>
+              </a:rPr>
+              <a:t>if msg.value() is None: 출력 뒤 continue</a:t>
+            </a:r>
+          </a:p>
+        </p:txBody>
+      </p:sp>
+      <p:sp>
+        <p:nvSpPr>
+          <p:cNvPr id="22" name="Oval 21"/>
+          <p:cNvSpPr/>
+          <p:nvPr/>
+        </p:nvSpPr>
+        <p:spPr>
+          <a:xfrm>
+            <a:off x="10077450" y="5527358"/>
+            <a:ext cx="97155" cy="97155"/>
           </a:xfrm>
           <a:prstGeom prst="ellipse">
             <a:avLst/>
           </a:prstGeom>
           <a:solidFill>
-            <a:srgbClr val="0D2B5E"/>
+            <a:srgbClr val="1E5BC6"/>
           </a:solidFill>
           <a:ln>
             <a:noFill/>
@@ -4158,55 +4349,14 @@
       </p:sp>
       <p:sp>
         <p:nvSpPr>
-          <p:cNvPr id="18" name="TextBox 17"/>
-          <p:cNvSpPr txBox="1"/>
-          <p:nvPr/>
-        </p:nvSpPr>
-        <p:spPr>
-          <a:xfrm>
-            <a:off x="1390650" y="4810125"/>
-            <a:ext cx="533400" cy="323850"/>
-          </a:xfrm>
-          <a:prstGeom prst="rect">
-            <a:avLst/>
-          </a:prstGeom>
-          <a:noFill/>
-        </p:spPr>
-        <p:txBody>
-          <a:bodyPr wrap="square" lIns="0" rIns="0" tIns="0" bIns="0" anchor="t">
-            <a:spAutoFit/>
-          </a:bodyPr>
-          <a:lstStyle/>
-          <a:p>
-            <a:pPr algn="ctr">
-              <a:lnSpc>
-                <a:spcPct val="100000"/>
-              </a:lnSpc>
-            </a:pPr>
-            <a:r>
-              <a:rPr sz="2100" b="1">
-                <a:solidFill>
-                  <a:srgbClr val="FFFFFF"/>
-                </a:solidFill>
-                <a:latin typeface="Pretendard"/>
-                <a:ea typeface="Pretendard"/>
-                <a:cs typeface="Pretendard"/>
-              </a:rPr>
-              <a:t>3</a:t>
-            </a:r>
-          </a:p>
-        </p:txBody>
-      </p:sp>
-      <p:sp>
-        <p:nvSpPr>
-          <p:cNvPr id="19" name="TextBox 18"/>
-          <p:cNvSpPr txBox="1"/>
-          <p:nvPr/>
-        </p:nvSpPr>
-        <p:spPr>
-          <a:xfrm>
-            <a:off x="2190750" y="4581525"/>
-            <a:ext cx="14573250" cy="742950"/>
+          <p:cNvPr id="23" name="TextBox 22"/>
+          <p:cNvSpPr txBox="1"/>
+          <p:nvPr/>
+        </p:nvSpPr>
+        <p:spPr>
+          <a:xfrm>
+            <a:off x="10263188" y="5349240"/>
+            <a:ext cx="6634162" cy="453390"/>
           </a:xfrm>
           <a:prstGeom prst="rect">
             <a:avLst/>
@@ -4221,73 +4371,39 @@
           <a:p>
             <a:pPr algn="l">
               <a:lnSpc>
-                <a:spcPct val="100000"/>
-              </a:lnSpc>
-            </a:pPr>
-            <a:r>
-              <a:rPr sz="2100" b="1">
-                <a:solidFill>
-                  <a:srgbClr val="0D2B5E"/>
-                </a:solidFill>
-                <a:latin typeface="Pretendard"/>
-                <a:ea typeface="Pretendard"/>
-                <a:cs typeface="Pretendard"/>
-              </a:rPr>
-              <a:t>status 의 connector.state·tasks[0].state 가 RUNNING</a:t>
-            </a:r>
-          </a:p>
-        </p:txBody>
-      </p:sp>
-      <p:sp>
-        <p:nvSpPr>
-          <p:cNvPr id="20" name="Rounded Rectangle 19"/>
-          <p:cNvSpPr/>
-          <p:nvPr/>
-        </p:nvSpPr>
-        <p:spPr>
-          <a:xfrm>
-            <a:off x="1143000" y="5438775"/>
-            <a:ext cx="16002000" cy="742950"/>
-          </a:xfrm>
-          <a:prstGeom prst="roundRect">
-            <a:avLst>
-              <a:gd name="adj" fmla="val 6410"/>
-            </a:avLst>
-          </a:prstGeom>
-          <a:solidFill>
-            <a:srgbClr val="FAFBFD"/>
-          </a:solidFill>
-          <a:ln w="9525">
-            <a:solidFill>
-              <a:srgbClr val="DCE1E8"/>
-            </a:solidFill>
-          </a:ln>
-          <a:effectLst/>
-        </p:spPr>
-        <p:txBody>
-          <a:bodyPr rtlCol="0" anchor="ctr" wrap="square"/>
-          <a:lstStyle/>
-          <a:p>
-            <a:pPr algn="ctr"/>
-          </a:p>
-        </p:txBody>
-      </p:sp>
-      <p:sp>
-        <p:nvSpPr>
-          <p:cNvPr id="21" name="Oval 20"/>
-          <p:cNvSpPr/>
-          <p:nvPr/>
-        </p:nvSpPr>
-        <p:spPr>
-          <a:xfrm>
-            <a:off x="1390650" y="5543550"/>
-            <a:ext cx="533400" cy="533400"/>
+                <a:spcPct val="120000"/>
+              </a:lnSpc>
+            </a:pPr>
+            <a:r>
+              <a:rPr sz="1575" b="0">
+                <a:solidFill>
+                  <a:srgbClr val="3D3D3D"/>
+                </a:solidFill>
+                <a:latin typeface="Pretendard"/>
+                <a:ea typeface="Pretendard"/>
+                <a:cs typeface="Pretendard"/>
+              </a:rPr>
+              <a:t>툼스톤 = 「이 키는 지워졌다」 표시</a:t>
+            </a:r>
+          </a:p>
+        </p:txBody>
+      </p:sp>
+      <p:sp>
+        <p:nvSpPr>
+          <p:cNvPr id="24" name="Oval 23"/>
+          <p:cNvSpPr/>
+          <p:nvPr/>
+        </p:nvSpPr>
+        <p:spPr>
+          <a:xfrm>
+            <a:off x="10077450" y="6037898"/>
+            <a:ext cx="97155" cy="97155"/>
           </a:xfrm>
           <a:prstGeom prst="ellipse">
             <a:avLst/>
           </a:prstGeom>
           <a:solidFill>
-            <a:srgbClr val="0D2B5E"/>
+            <a:srgbClr val="1E5BC6"/>
           </a:solidFill>
           <a:ln>
             <a:noFill/>
@@ -4304,55 +4420,14 @@
       </p:sp>
       <p:sp>
         <p:nvSpPr>
-          <p:cNvPr id="22" name="TextBox 21"/>
-          <p:cNvSpPr txBox="1"/>
-          <p:nvPr/>
-        </p:nvSpPr>
-        <p:spPr>
-          <a:xfrm>
-            <a:off x="1390650" y="5667375"/>
-            <a:ext cx="533400" cy="323850"/>
-          </a:xfrm>
-          <a:prstGeom prst="rect">
-            <a:avLst/>
-          </a:prstGeom>
-          <a:noFill/>
-        </p:spPr>
-        <p:txBody>
-          <a:bodyPr wrap="square" lIns="0" rIns="0" tIns="0" bIns="0" anchor="t">
-            <a:spAutoFit/>
-          </a:bodyPr>
-          <a:lstStyle/>
-          <a:p>
-            <a:pPr algn="ctr">
-              <a:lnSpc>
-                <a:spcPct val="100000"/>
-              </a:lnSpc>
-            </a:pPr>
-            <a:r>
-              <a:rPr sz="2100" b="1">
-                <a:solidFill>
-                  <a:srgbClr val="FFFFFF"/>
-                </a:solidFill>
-                <a:latin typeface="Pretendard"/>
-                <a:ea typeface="Pretendard"/>
-                <a:cs typeface="Pretendard"/>
-              </a:rPr>
-              <a:t>4</a:t>
-            </a:r>
-          </a:p>
-        </p:txBody>
-      </p:sp>
-      <p:sp>
-        <p:nvSpPr>
-          <p:cNvPr id="23" name="TextBox 22"/>
-          <p:cNvSpPr txBox="1"/>
-          <p:nvPr/>
-        </p:nvSpPr>
-        <p:spPr>
-          <a:xfrm>
-            <a:off x="2190750" y="5438775"/>
-            <a:ext cx="14573250" cy="742950"/>
+          <p:cNvPr id="25" name="TextBox 24"/>
+          <p:cNvSpPr txBox="1"/>
+          <p:nvPr/>
+        </p:nvSpPr>
+        <p:spPr>
+          <a:xfrm>
+            <a:off x="10263188" y="5859780"/>
+            <a:ext cx="6634162" cy="453390"/>
           </a:xfrm>
           <a:prstGeom prst="rect">
             <a:avLst/>
@@ -4367,67 +4442,33 @@
           <a:p>
             <a:pPr algn="l">
               <a:lnSpc>
-                <a:spcPct val="100000"/>
-              </a:lnSpc>
-            </a:pPr>
-            <a:r>
-              <a:rPr sz="2100" b="1">
-                <a:solidFill>
-                  <a:srgbClr val="0D2B5E"/>
-                </a:solidFill>
-                <a:latin typeface="Pretendard"/>
-                <a:ea typeface="Pretendard"/>
-                <a:cs typeface="Pretendard"/>
-              </a:rPr>
-              <a:t>토픽 목록에 shop.shop.orders 와 schema-changes.shop</a:t>
-            </a:r>
-          </a:p>
-        </p:txBody>
-      </p:sp>
-      <p:sp>
-        <p:nvSpPr>
-          <p:cNvPr id="24" name="Rounded Rectangle 23"/>
-          <p:cNvSpPr/>
-          <p:nvPr/>
-        </p:nvSpPr>
-        <p:spPr>
-          <a:xfrm>
-            <a:off x="1143000" y="6296025"/>
-            <a:ext cx="16002000" cy="742950"/>
-          </a:xfrm>
-          <a:prstGeom prst="roundRect">
-            <a:avLst>
-              <a:gd name="adj" fmla="val 6410"/>
-            </a:avLst>
-          </a:prstGeom>
-          <a:solidFill>
-            <a:srgbClr val="FAFBFD"/>
-          </a:solidFill>
-          <a:ln w="9525">
-            <a:solidFill>
-              <a:srgbClr val="DCE1E8"/>
-            </a:solidFill>
-          </a:ln>
-          <a:effectLst/>
-        </p:spPr>
-        <p:txBody>
-          <a:bodyPr rtlCol="0" anchor="ctr" wrap="square"/>
-          <a:lstStyle/>
-          <a:p>
-            <a:pPr algn="ctr"/>
-          </a:p>
-        </p:txBody>
-      </p:sp>
-      <p:sp>
-        <p:nvSpPr>
-          <p:cNvPr id="25" name="Oval 24"/>
-          <p:cNvSpPr/>
-          <p:nvPr/>
-        </p:nvSpPr>
-        <p:spPr>
-          <a:xfrm>
-            <a:off x="1390650" y="6400800"/>
-            <a:ext cx="533400" cy="533400"/>
+                <a:spcPct val="120000"/>
+              </a:lnSpc>
+            </a:pPr>
+            <a:r>
+              <a:rPr sz="1575" b="0">
+                <a:solidFill>
+                  <a:srgbClr val="3D3D3D"/>
+                </a:solidFill>
+                <a:latin typeface="Pretendard"/>
+                <a:ea typeface="Pretendard"/>
+                <a:cs typeface="Pretendard"/>
+              </a:rPr>
+              <a:t>6-5 Sink 도 이 메시지를 따로 다룬다</a:t>
+            </a:r>
+          </a:p>
+        </p:txBody>
+      </p:sp>
+      <p:sp>
+        <p:nvSpPr>
+          <p:cNvPr id="26" name="Oval 25"/>
+          <p:cNvSpPr/>
+          <p:nvPr/>
+        </p:nvSpPr>
+        <p:spPr>
+          <a:xfrm>
+            <a:off x="8686800" y="3771900"/>
+            <a:ext cx="914400" cy="914400"/>
           </a:xfrm>
           <a:prstGeom prst="ellipse">
             <a:avLst/>
@@ -4450,14 +4491,14 @@
       </p:sp>
       <p:sp>
         <p:nvSpPr>
-          <p:cNvPr id="26" name="TextBox 25"/>
-          <p:cNvSpPr txBox="1"/>
-          <p:nvPr/>
-        </p:nvSpPr>
-        <p:spPr>
-          <a:xfrm>
-            <a:off x="1390650" y="6524625"/>
-            <a:ext cx="533400" cy="323850"/>
+          <p:cNvPr id="27" name="TextBox 26"/>
+          <p:cNvSpPr txBox="1"/>
+          <p:nvPr/>
+        </p:nvSpPr>
+        <p:spPr>
+          <a:xfrm>
+            <a:off x="8686800" y="4057650"/>
+            <a:ext cx="914400" cy="381000"/>
           </a:xfrm>
           <a:prstGeom prst="rect">
             <a:avLst/>
@@ -4476,7 +4517,7 @@
               </a:lnSpc>
             </a:pPr>
             <a:r>
-              <a:rPr sz="2100" b="1">
+              <a:rPr sz="2250" b="1">
                 <a:solidFill>
                   <a:srgbClr val="FFFFFF"/>
                 </a:solidFill>
@@ -4484,102 +4525,27 @@
                 <a:ea typeface="Pretendard"/>
                 <a:cs typeface="Pretendard"/>
               </a:rPr>
-              <a:t>5</a:t>
-            </a:r>
-          </a:p>
-        </p:txBody>
-      </p:sp>
-      <p:sp>
-        <p:nvSpPr>
-          <p:cNvPr id="27" name="TextBox 26"/>
-          <p:cNvSpPr txBox="1"/>
-          <p:nvPr/>
-        </p:nvSpPr>
-        <p:spPr>
-          <a:xfrm>
-            <a:off x="2190750" y="6296025"/>
-            <a:ext cx="14573250" cy="742950"/>
-          </a:xfrm>
-          <a:prstGeom prst="rect">
-            <a:avLst/>
-          </a:prstGeom>
-          <a:noFill/>
-        </p:spPr>
-        <p:txBody>
-          <a:bodyPr wrap="square" lIns="0" rIns="0" tIns="0" bIns="0" anchor="ctr">
-            <a:spAutoFit/>
-          </a:bodyPr>
-          <a:lstStyle/>
-          <a:p>
-            <a:pPr algn="l">
-              <a:lnSpc>
-                <a:spcPct val="100000"/>
-              </a:lnSpc>
-            </a:pPr>
-            <a:r>
-              <a:rPr sz="2100" b="1">
-                <a:solidFill>
-                  <a:srgbClr val="0D2B5E"/>
-                </a:solidFill>
-                <a:latin typeface="Pretendard"/>
-                <a:ea typeface="Pretendard"/>
-                <a:cs typeface="Pretendard"/>
-              </a:rPr>
-              <a:t>op=r(before=null) → c · u(CREATED→PAID) · d(after=null)</a:t>
-            </a:r>
-          </a:p>
-        </p:txBody>
-      </p:sp>
-      <p:sp>
-        <p:nvSpPr>
-          <p:cNvPr id="28" name="Rounded Rectangle 27"/>
-          <p:cNvSpPr/>
-          <p:nvPr/>
-        </p:nvSpPr>
-        <p:spPr>
-          <a:xfrm>
-            <a:off x="1143000" y="7153275"/>
-            <a:ext cx="16002000" cy="742950"/>
-          </a:xfrm>
-          <a:prstGeom prst="roundRect">
-            <a:avLst>
-              <a:gd name="adj" fmla="val 6410"/>
-            </a:avLst>
-          </a:prstGeom>
-          <a:solidFill>
-            <a:srgbClr val="FAFBFD"/>
-          </a:solidFill>
-          <a:ln w="9525">
-            <a:solidFill>
-              <a:srgbClr val="DCE1E8"/>
-            </a:solidFill>
-          </a:ln>
-          <a:effectLst/>
-        </p:spPr>
-        <p:txBody>
-          <a:bodyPr rtlCol="0" anchor="ctr" wrap="square"/>
-          <a:lstStyle/>
-          <a:p>
-            <a:pPr algn="ctr"/>
-          </a:p>
-        </p:txBody>
-      </p:sp>
-      <p:sp>
-        <p:nvSpPr>
-          <p:cNvPr id="29" name="Oval 28"/>
-          <p:cNvSpPr/>
-          <p:nvPr/>
-        </p:nvSpPr>
-        <p:spPr>
-          <a:xfrm>
-            <a:off x="1390650" y="7258050"/>
-            <a:ext cx="533400" cy="533400"/>
-          </a:xfrm>
-          <a:prstGeom prst="ellipse">
-            <a:avLst/>
-          </a:prstGeom>
-          <a:solidFill>
-            <a:srgbClr val="0D2B5E"/>
+              <a:t>VS</a:t>
+            </a:r>
+          </a:p>
+        </p:txBody>
+      </p:sp>
+      <p:sp>
+        <p:nvSpPr>
+          <p:cNvPr id="28" name="Rectangle 27"/>
+          <p:cNvSpPr/>
+          <p:nvPr/>
+        </p:nvSpPr>
+        <p:spPr>
+          <a:xfrm>
+            <a:off x="1143000" y="8058150"/>
+            <a:ext cx="16002000" cy="9525"/>
+          </a:xfrm>
+          <a:prstGeom prst="rect">
+            <a:avLst/>
+          </a:prstGeom>
+          <a:solidFill>
+            <a:srgbClr val="DCE1E8"/>
           </a:solidFill>
           <a:ln>
             <a:noFill/>
@@ -4596,119 +4562,7 @@
       </p:sp>
       <p:sp>
         <p:nvSpPr>
-          <p:cNvPr id="30" name="TextBox 29"/>
-          <p:cNvSpPr txBox="1"/>
-          <p:nvPr/>
-        </p:nvSpPr>
-        <p:spPr>
-          <a:xfrm>
-            <a:off x="1390650" y="7381875"/>
-            <a:ext cx="533400" cy="323850"/>
-          </a:xfrm>
-          <a:prstGeom prst="rect">
-            <a:avLst/>
-          </a:prstGeom>
-          <a:noFill/>
-        </p:spPr>
-        <p:txBody>
-          <a:bodyPr wrap="square" lIns="0" rIns="0" tIns="0" bIns="0" anchor="t">
-            <a:spAutoFit/>
-          </a:bodyPr>
-          <a:lstStyle/>
-          <a:p>
-            <a:pPr algn="ctr">
-              <a:lnSpc>
-                <a:spcPct val="100000"/>
-              </a:lnSpc>
-            </a:pPr>
-            <a:r>
-              <a:rPr sz="2100" b="1">
-                <a:solidFill>
-                  <a:srgbClr val="FFFFFF"/>
-                </a:solidFill>
-                <a:latin typeface="Pretendard"/>
-                <a:ea typeface="Pretendard"/>
-                <a:cs typeface="Pretendard"/>
-              </a:rPr>
-              <a:t>6</a:t>
-            </a:r>
-          </a:p>
-        </p:txBody>
-      </p:sp>
-      <p:sp>
-        <p:nvSpPr>
-          <p:cNvPr id="31" name="TextBox 30"/>
-          <p:cNvSpPr txBox="1"/>
-          <p:nvPr/>
-        </p:nvSpPr>
-        <p:spPr>
-          <a:xfrm>
-            <a:off x="2190750" y="7153275"/>
-            <a:ext cx="14573250" cy="742950"/>
-          </a:xfrm>
-          <a:prstGeom prst="rect">
-            <a:avLst/>
-          </a:prstGeom>
-          <a:noFill/>
-        </p:spPr>
-        <p:txBody>
-          <a:bodyPr wrap="square" lIns="0" rIns="0" tIns="0" bIns="0" anchor="ctr">
-            <a:spAutoFit/>
-          </a:bodyPr>
-          <a:lstStyle/>
-          <a:p>
-            <a:pPr algn="l">
-              <a:lnSpc>
-                <a:spcPct val="100000"/>
-              </a:lnSpc>
-            </a:pPr>
-            <a:r>
-              <a:rPr sz="2100" b="1">
-                <a:solidFill>
-                  <a:srgbClr val="0D2B5E"/>
-                </a:solidFill>
-                <a:latin typeface="Pretendard"/>
-                <a:ea typeface="Pretendard"/>
-                <a:cs typeface="Pretendard"/>
-              </a:rPr>
-              <a:t>cdc_reader 에 네 종류가 한 줄씩 — 7단계 SQL 이 즉시 나타난다</a:t>
-            </a:r>
-          </a:p>
-        </p:txBody>
-      </p:sp>
-      <p:sp>
-        <p:nvSpPr>
-          <p:cNvPr id="32" name="Rectangle 31"/>
-          <p:cNvSpPr/>
-          <p:nvPr/>
-        </p:nvSpPr>
-        <p:spPr>
-          <a:xfrm>
-            <a:off x="1143000" y="8058150"/>
-            <a:ext cx="16002000" cy="9525"/>
-          </a:xfrm>
-          <a:prstGeom prst="rect">
-            <a:avLst/>
-          </a:prstGeom>
-          <a:solidFill>
-            <a:srgbClr val="DCE1E8"/>
-          </a:solidFill>
-          <a:ln>
-            <a:noFill/>
-          </a:ln>
-          <a:effectLst/>
-        </p:spPr>
-        <p:txBody>
-          <a:bodyPr rtlCol="0" anchor="ctr" wrap="square"/>
-          <a:lstStyle/>
-          <a:p>
-            <a:pPr algn="ctr"/>
-          </a:p>
-        </p:txBody>
-      </p:sp>
-      <p:sp>
-        <p:nvSpPr>
-          <p:cNvPr id="33" name="TextBox 32"/>
+          <p:cNvPr id="29" name="TextBox 28"/>
           <p:cNvSpPr txBox="1"/>
           <p:nvPr/>
         </p:nvSpPr>
@@ -4749,7 +4603,7 @@
       </p:sp>
       <p:sp>
         <p:nvSpPr>
-          <p:cNvPr id="34" name="TextBox 33"/>
+          <p:cNvPr id="30" name="TextBox 29"/>
           <p:cNvSpPr txBox="1"/>
           <p:nvPr/>
         </p:nvSpPr>
@@ -4808,7 +4662,1215 @@
       <p:grpSpPr/>
       <p:sp>
         <p:nvSpPr>
-          <p:cNvPr id="2" name="Oval 1"/>
+          <p:cNvPr id="2" name="deckgen:decor"/>
+          <p:cNvSpPr/>
+          <p:nvPr/>
+        </p:nvSpPr>
+        <p:spPr>
+          <a:xfrm>
+            <a:off x="15811500" y="8382000"/>
+            <a:ext cx="4953000" cy="4953000"/>
+          </a:xfrm>
+          <a:prstGeom prst="ellipse">
+            <a:avLst/>
+          </a:prstGeom>
+          <a:solidFill>
+            <a:srgbClr val="F3F6FC"/>
+          </a:solidFill>
+          <a:ln>
+            <a:noFill/>
+          </a:ln>
+          <a:effectLst/>
+        </p:spPr>
+        <p:txBody>
+          <a:bodyPr rtlCol="0" anchor="ctr" wrap="square"/>
+          <a:lstStyle/>
+          <a:p>
+            <a:pPr algn="ctr"/>
+          </a:p>
+        </p:txBody>
+      </p:sp>
+      <p:sp>
+        <p:nvSpPr>
+          <p:cNvPr id="3" name="deckgen:decor"/>
+          <p:cNvSpPr/>
+          <p:nvPr/>
+        </p:nvSpPr>
+        <p:spPr>
+          <a:xfrm>
+            <a:off x="16859250" y="9429750"/>
+            <a:ext cx="2857500" cy="2857500"/>
+          </a:xfrm>
+          <a:prstGeom prst="ellipse">
+            <a:avLst/>
+          </a:prstGeom>
+          <a:solidFill>
+            <a:srgbClr val="FFFFFF"/>
+          </a:solidFill>
+          <a:ln>
+            <a:noFill/>
+          </a:ln>
+          <a:effectLst/>
+        </p:spPr>
+        <p:txBody>
+          <a:bodyPr rtlCol="0" anchor="ctr" wrap="square"/>
+          <a:lstStyle/>
+          <a:p>
+            <a:pPr algn="ctr"/>
+          </a:p>
+        </p:txBody>
+      </p:sp>
+      <p:sp>
+        <p:nvSpPr>
+          <p:cNvPr id="4" name="deckgen:decor"/>
+          <p:cNvSpPr/>
+          <p:nvPr/>
+        </p:nvSpPr>
+        <p:spPr>
+          <a:xfrm>
+            <a:off x="-1428750" y="1428750"/>
+            <a:ext cx="2857500" cy="2857500"/>
+          </a:xfrm>
+          <a:prstGeom prst="ellipse">
+            <a:avLst/>
+          </a:prstGeom>
+          <a:solidFill>
+            <a:srgbClr val="F7F8FA"/>
+          </a:solidFill>
+          <a:ln>
+            <a:noFill/>
+          </a:ln>
+          <a:effectLst/>
+        </p:spPr>
+        <p:txBody>
+          <a:bodyPr rtlCol="0" anchor="ctr" wrap="square"/>
+          <a:lstStyle/>
+          <a:p>
+            <a:pPr algn="ctr"/>
+          </a:p>
+        </p:txBody>
+      </p:sp>
+      <p:sp>
+        <p:nvSpPr>
+          <p:cNvPr id="5" name="TextBox 4"/>
+          <p:cNvSpPr txBox="1"/>
+          <p:nvPr/>
+        </p:nvSpPr>
+        <p:spPr>
+          <a:xfrm>
+            <a:off x="1143000" y="838200"/>
+            <a:ext cx="16002000" cy="342900"/>
+          </a:xfrm>
+          <a:prstGeom prst="rect">
+            <a:avLst/>
+          </a:prstGeom>
+          <a:noFill/>
+        </p:spPr>
+        <p:txBody>
+          <a:bodyPr wrap="square" lIns="0" rIns="0" tIns="0" bIns="0" anchor="t">
+            <a:spAutoFit/>
+          </a:bodyPr>
+          <a:lstStyle/>
+          <a:p>
+            <a:pPr algn="l">
+              <a:lnSpc>
+                <a:spcPct val="100000"/>
+              </a:lnSpc>
+            </a:pPr>
+            <a:r>
+              <a:rPr sz="1950" b="1" spc="160">
+                <a:solidFill>
+                  <a:srgbClr val="1E5BC6"/>
+                </a:solidFill>
+                <a:latin typeface="Pretendard"/>
+                <a:ea typeface="Pretendard"/>
+                <a:cs typeface="Pretendard"/>
+              </a:rPr>
+              <a:t>확인 포인트</a:t>
+            </a:r>
+          </a:p>
+        </p:txBody>
+      </p:sp>
+      <p:sp>
+        <p:nvSpPr>
+          <p:cNvPr id="6" name="TextBox 5"/>
+          <p:cNvSpPr txBox="1"/>
+          <p:nvPr/>
+        </p:nvSpPr>
+        <p:spPr>
+          <a:xfrm>
+            <a:off x="1143000" y="1162050"/>
+            <a:ext cx="16002000" cy="762000"/>
+          </a:xfrm>
+          <a:prstGeom prst="rect">
+            <a:avLst/>
+          </a:prstGeom>
+          <a:noFill/>
+        </p:spPr>
+        <p:txBody>
+          <a:bodyPr wrap="square" lIns="0" rIns="0" tIns="0" bIns="0" anchor="t">
+            <a:spAutoFit/>
+          </a:bodyPr>
+          <a:lstStyle/>
+          <a:p>
+            <a:pPr algn="l">
+              <a:lnSpc>
+                <a:spcPct val="100000"/>
+              </a:lnSpc>
+            </a:pPr>
+            <a:r>
+              <a:rPr sz="5100" b="1">
+                <a:solidFill>
+                  <a:srgbClr val="0D2B5E"/>
+                </a:solidFill>
+                <a:latin typeface="Pretendard"/>
+                <a:ea typeface="Pretendard"/>
+                <a:cs typeface="Pretendard"/>
+              </a:rPr>
+              <a:t>이 2.5시간이 끝날 때 확인할 것</a:t>
+            </a:r>
+          </a:p>
+        </p:txBody>
+      </p:sp>
+      <p:sp>
+        <p:nvSpPr>
+          <p:cNvPr id="7" name="Rectangle 6"/>
+          <p:cNvSpPr/>
+          <p:nvPr/>
+        </p:nvSpPr>
+        <p:spPr>
+          <a:xfrm>
+            <a:off x="1143000" y="2038350"/>
+            <a:ext cx="16002000" cy="28575"/>
+          </a:xfrm>
+          <a:prstGeom prst="rect">
+            <a:avLst/>
+          </a:prstGeom>
+          <a:solidFill>
+            <a:srgbClr val="0D2B5E"/>
+          </a:solidFill>
+          <a:ln>
+            <a:noFill/>
+          </a:ln>
+          <a:effectLst/>
+        </p:spPr>
+        <p:txBody>
+          <a:bodyPr rtlCol="0" anchor="ctr" wrap="square"/>
+          <a:lstStyle/>
+          <a:p>
+            <a:pPr algn="ctr"/>
+          </a:p>
+        </p:txBody>
+      </p:sp>
+      <p:sp>
+        <p:nvSpPr>
+          <p:cNvPr id="8" name="Rounded Rectangle 7"/>
+          <p:cNvSpPr/>
+          <p:nvPr/>
+        </p:nvSpPr>
+        <p:spPr>
+          <a:xfrm>
+            <a:off x="1143000" y="2867025"/>
+            <a:ext cx="16002000" cy="742950"/>
+          </a:xfrm>
+          <a:prstGeom prst="roundRect">
+            <a:avLst>
+              <a:gd name="adj" fmla="val 6410"/>
+            </a:avLst>
+          </a:prstGeom>
+          <a:solidFill>
+            <a:srgbClr val="FAFBFD"/>
+          </a:solidFill>
+          <a:ln w="9525">
+            <a:solidFill>
+              <a:srgbClr val="DCE1E8"/>
+            </a:solidFill>
+          </a:ln>
+          <a:effectLst/>
+        </p:spPr>
+        <p:txBody>
+          <a:bodyPr rtlCol="0" anchor="ctr" wrap="square"/>
+          <a:lstStyle/>
+          <a:p>
+            <a:pPr algn="ctr"/>
+          </a:p>
+        </p:txBody>
+      </p:sp>
+      <p:sp>
+        <p:nvSpPr>
+          <p:cNvPr id="9" name="Oval 8"/>
+          <p:cNvSpPr/>
+          <p:nvPr/>
+        </p:nvSpPr>
+        <p:spPr>
+          <a:xfrm>
+            <a:off x="1390650" y="2971800"/>
+            <a:ext cx="533400" cy="533400"/>
+          </a:xfrm>
+          <a:prstGeom prst="ellipse">
+            <a:avLst/>
+          </a:prstGeom>
+          <a:solidFill>
+            <a:srgbClr val="0D2B5E"/>
+          </a:solidFill>
+          <a:ln>
+            <a:noFill/>
+          </a:ln>
+          <a:effectLst/>
+        </p:spPr>
+        <p:txBody>
+          <a:bodyPr rtlCol="0" anchor="ctr" wrap="square"/>
+          <a:lstStyle/>
+          <a:p>
+            <a:pPr algn="ctr"/>
+          </a:p>
+        </p:txBody>
+      </p:sp>
+      <p:sp>
+        <p:nvSpPr>
+          <p:cNvPr id="10" name="TextBox 9"/>
+          <p:cNvSpPr txBox="1"/>
+          <p:nvPr/>
+        </p:nvSpPr>
+        <p:spPr>
+          <a:xfrm>
+            <a:off x="1390650" y="3095625"/>
+            <a:ext cx="533400" cy="323850"/>
+          </a:xfrm>
+          <a:prstGeom prst="rect">
+            <a:avLst/>
+          </a:prstGeom>
+          <a:noFill/>
+        </p:spPr>
+        <p:txBody>
+          <a:bodyPr wrap="square" lIns="0" rIns="0" tIns="0" bIns="0" anchor="t">
+            <a:spAutoFit/>
+          </a:bodyPr>
+          <a:lstStyle/>
+          <a:p>
+            <a:pPr algn="ctr">
+              <a:lnSpc>
+                <a:spcPct val="100000"/>
+              </a:lnSpc>
+            </a:pPr>
+            <a:r>
+              <a:rPr sz="2100" b="1">
+                <a:solidFill>
+                  <a:srgbClr val="FFFFFF"/>
+                </a:solidFill>
+                <a:latin typeface="Pretendard"/>
+                <a:ea typeface="Pretendard"/>
+                <a:cs typeface="Pretendard"/>
+              </a:rPr>
+              <a:t>1</a:t>
+            </a:r>
+          </a:p>
+        </p:txBody>
+      </p:sp>
+      <p:sp>
+        <p:nvSpPr>
+          <p:cNvPr id="11" name="TextBox 10"/>
+          <p:cNvSpPr txBox="1"/>
+          <p:nvPr/>
+        </p:nvSpPr>
+        <p:spPr>
+          <a:xfrm>
+            <a:off x="2190750" y="2867025"/>
+            <a:ext cx="14573250" cy="742950"/>
+          </a:xfrm>
+          <a:prstGeom prst="rect">
+            <a:avLst/>
+          </a:prstGeom>
+          <a:noFill/>
+        </p:spPr>
+        <p:txBody>
+          <a:bodyPr wrap="square" lIns="0" rIns="0" tIns="0" bIns="0" anchor="ctr">
+            <a:spAutoFit/>
+          </a:bodyPr>
+          <a:lstStyle/>
+          <a:p>
+            <a:pPr algn="l">
+              <a:lnSpc>
+                <a:spcPct val="100000"/>
+              </a:lnSpc>
+            </a:pPr>
+            <a:r>
+              <a:rPr sz="2100" b="1">
+                <a:solidFill>
+                  <a:srgbClr val="0D2B5E"/>
+                </a:solidFill>
+                <a:latin typeface="Pretendard"/>
+                <a:ea typeface="Pretendard"/>
+                <a:cs typeface="Pretendard"/>
+              </a:rPr>
+              <a:t>log_bin=ON · binlog_format=ROW · curl 8083 에 version 3.7.0</a:t>
+            </a:r>
+          </a:p>
+        </p:txBody>
+      </p:sp>
+      <p:sp>
+        <p:nvSpPr>
+          <p:cNvPr id="12" name="Rounded Rectangle 11"/>
+          <p:cNvSpPr/>
+          <p:nvPr/>
+        </p:nvSpPr>
+        <p:spPr>
+          <a:xfrm>
+            <a:off x="1143000" y="3724275"/>
+            <a:ext cx="16002000" cy="742950"/>
+          </a:xfrm>
+          <a:prstGeom prst="roundRect">
+            <a:avLst>
+              <a:gd name="adj" fmla="val 6410"/>
+            </a:avLst>
+          </a:prstGeom>
+          <a:solidFill>
+            <a:srgbClr val="FAFBFD"/>
+          </a:solidFill>
+          <a:ln w="9525">
+            <a:solidFill>
+              <a:srgbClr val="DCE1E8"/>
+            </a:solidFill>
+          </a:ln>
+          <a:effectLst/>
+        </p:spPr>
+        <p:txBody>
+          <a:bodyPr rtlCol="0" anchor="ctr" wrap="square"/>
+          <a:lstStyle/>
+          <a:p>
+            <a:pPr algn="ctr"/>
+          </a:p>
+        </p:txBody>
+      </p:sp>
+      <p:sp>
+        <p:nvSpPr>
+          <p:cNvPr id="13" name="Oval 12"/>
+          <p:cNvSpPr/>
+          <p:nvPr/>
+        </p:nvSpPr>
+        <p:spPr>
+          <a:xfrm>
+            <a:off x="1390650" y="3829050"/>
+            <a:ext cx="533400" cy="533400"/>
+          </a:xfrm>
+          <a:prstGeom prst="ellipse">
+            <a:avLst/>
+          </a:prstGeom>
+          <a:solidFill>
+            <a:srgbClr val="0D2B5E"/>
+          </a:solidFill>
+          <a:ln>
+            <a:noFill/>
+          </a:ln>
+          <a:effectLst/>
+        </p:spPr>
+        <p:txBody>
+          <a:bodyPr rtlCol="0" anchor="ctr" wrap="square"/>
+          <a:lstStyle/>
+          <a:p>
+            <a:pPr algn="ctr"/>
+          </a:p>
+        </p:txBody>
+      </p:sp>
+      <p:sp>
+        <p:nvSpPr>
+          <p:cNvPr id="14" name="TextBox 13"/>
+          <p:cNvSpPr txBox="1"/>
+          <p:nvPr/>
+        </p:nvSpPr>
+        <p:spPr>
+          <a:xfrm>
+            <a:off x="1390650" y="3952875"/>
+            <a:ext cx="533400" cy="323850"/>
+          </a:xfrm>
+          <a:prstGeom prst="rect">
+            <a:avLst/>
+          </a:prstGeom>
+          <a:noFill/>
+        </p:spPr>
+        <p:txBody>
+          <a:bodyPr wrap="square" lIns="0" rIns="0" tIns="0" bIns="0" anchor="t">
+            <a:spAutoFit/>
+          </a:bodyPr>
+          <a:lstStyle/>
+          <a:p>
+            <a:pPr algn="ctr">
+              <a:lnSpc>
+                <a:spcPct val="100000"/>
+              </a:lnSpc>
+            </a:pPr>
+            <a:r>
+              <a:rPr sz="2100" b="1">
+                <a:solidFill>
+                  <a:srgbClr val="FFFFFF"/>
+                </a:solidFill>
+                <a:latin typeface="Pretendard"/>
+                <a:ea typeface="Pretendard"/>
+                <a:cs typeface="Pretendard"/>
+              </a:rPr>
+              <a:t>2</a:t>
+            </a:r>
+          </a:p>
+        </p:txBody>
+      </p:sp>
+      <p:sp>
+        <p:nvSpPr>
+          <p:cNvPr id="15" name="TextBox 14"/>
+          <p:cNvSpPr txBox="1"/>
+          <p:nvPr/>
+        </p:nvSpPr>
+        <p:spPr>
+          <a:xfrm>
+            <a:off x="2190750" y="3724275"/>
+            <a:ext cx="14573250" cy="742950"/>
+          </a:xfrm>
+          <a:prstGeom prst="rect">
+            <a:avLst/>
+          </a:prstGeom>
+          <a:noFill/>
+        </p:spPr>
+        <p:txBody>
+          <a:bodyPr wrap="square" lIns="0" rIns="0" tIns="0" bIns="0" anchor="ctr">
+            <a:spAutoFit/>
+          </a:bodyPr>
+          <a:lstStyle/>
+          <a:p>
+            <a:pPr algn="l">
+              <a:lnSpc>
+                <a:spcPct val="100000"/>
+              </a:lnSpc>
+            </a:pPr>
+            <a:r>
+              <a:rPr sz="2100" b="1">
+                <a:solidFill>
+                  <a:srgbClr val="0D2B5E"/>
+                </a:solidFill>
+                <a:latin typeface="Pretendard"/>
+                <a:ea typeface="Pretendard"/>
+                <a:cs typeface="Pretendard"/>
+              </a:rPr>
+              <a:t>SELECT * FROM orders 에 2행</a:t>
+            </a:r>
+          </a:p>
+        </p:txBody>
+      </p:sp>
+      <p:sp>
+        <p:nvSpPr>
+          <p:cNvPr id="16" name="Rounded Rectangle 15"/>
+          <p:cNvSpPr/>
+          <p:nvPr/>
+        </p:nvSpPr>
+        <p:spPr>
+          <a:xfrm>
+            <a:off x="1143000" y="4581525"/>
+            <a:ext cx="16002000" cy="742950"/>
+          </a:xfrm>
+          <a:prstGeom prst="roundRect">
+            <a:avLst>
+              <a:gd name="adj" fmla="val 6410"/>
+            </a:avLst>
+          </a:prstGeom>
+          <a:solidFill>
+            <a:srgbClr val="FAFBFD"/>
+          </a:solidFill>
+          <a:ln w="9525">
+            <a:solidFill>
+              <a:srgbClr val="DCE1E8"/>
+            </a:solidFill>
+          </a:ln>
+          <a:effectLst/>
+        </p:spPr>
+        <p:txBody>
+          <a:bodyPr rtlCol="0" anchor="ctr" wrap="square"/>
+          <a:lstStyle/>
+          <a:p>
+            <a:pPr algn="ctr"/>
+          </a:p>
+        </p:txBody>
+      </p:sp>
+      <p:sp>
+        <p:nvSpPr>
+          <p:cNvPr id="17" name="Oval 16"/>
+          <p:cNvSpPr/>
+          <p:nvPr/>
+        </p:nvSpPr>
+        <p:spPr>
+          <a:xfrm>
+            <a:off x="1390650" y="4686300"/>
+            <a:ext cx="533400" cy="533400"/>
+          </a:xfrm>
+          <a:prstGeom prst="ellipse">
+            <a:avLst/>
+          </a:prstGeom>
+          <a:solidFill>
+            <a:srgbClr val="0D2B5E"/>
+          </a:solidFill>
+          <a:ln>
+            <a:noFill/>
+          </a:ln>
+          <a:effectLst/>
+        </p:spPr>
+        <p:txBody>
+          <a:bodyPr rtlCol="0" anchor="ctr" wrap="square"/>
+          <a:lstStyle/>
+          <a:p>
+            <a:pPr algn="ctr"/>
+          </a:p>
+        </p:txBody>
+      </p:sp>
+      <p:sp>
+        <p:nvSpPr>
+          <p:cNvPr id="18" name="TextBox 17"/>
+          <p:cNvSpPr txBox="1"/>
+          <p:nvPr/>
+        </p:nvSpPr>
+        <p:spPr>
+          <a:xfrm>
+            <a:off x="1390650" y="4810125"/>
+            <a:ext cx="533400" cy="323850"/>
+          </a:xfrm>
+          <a:prstGeom prst="rect">
+            <a:avLst/>
+          </a:prstGeom>
+          <a:noFill/>
+        </p:spPr>
+        <p:txBody>
+          <a:bodyPr wrap="square" lIns="0" rIns="0" tIns="0" bIns="0" anchor="t">
+            <a:spAutoFit/>
+          </a:bodyPr>
+          <a:lstStyle/>
+          <a:p>
+            <a:pPr algn="ctr">
+              <a:lnSpc>
+                <a:spcPct val="100000"/>
+              </a:lnSpc>
+            </a:pPr>
+            <a:r>
+              <a:rPr sz="2100" b="1">
+                <a:solidFill>
+                  <a:srgbClr val="FFFFFF"/>
+                </a:solidFill>
+                <a:latin typeface="Pretendard"/>
+                <a:ea typeface="Pretendard"/>
+                <a:cs typeface="Pretendard"/>
+              </a:rPr>
+              <a:t>3</a:t>
+            </a:r>
+          </a:p>
+        </p:txBody>
+      </p:sp>
+      <p:sp>
+        <p:nvSpPr>
+          <p:cNvPr id="19" name="TextBox 18"/>
+          <p:cNvSpPr txBox="1"/>
+          <p:nvPr/>
+        </p:nvSpPr>
+        <p:spPr>
+          <a:xfrm>
+            <a:off x="2190750" y="4581525"/>
+            <a:ext cx="14573250" cy="742950"/>
+          </a:xfrm>
+          <a:prstGeom prst="rect">
+            <a:avLst/>
+          </a:prstGeom>
+          <a:noFill/>
+        </p:spPr>
+        <p:txBody>
+          <a:bodyPr wrap="square" lIns="0" rIns="0" tIns="0" bIns="0" anchor="ctr">
+            <a:spAutoFit/>
+          </a:bodyPr>
+          <a:lstStyle/>
+          <a:p>
+            <a:pPr algn="l">
+              <a:lnSpc>
+                <a:spcPct val="100000"/>
+              </a:lnSpc>
+            </a:pPr>
+            <a:r>
+              <a:rPr sz="2100" b="1">
+                <a:solidFill>
+                  <a:srgbClr val="0D2B5E"/>
+                </a:solidFill>
+                <a:latin typeface="Pretendard"/>
+                <a:ea typeface="Pretendard"/>
+                <a:cs typeface="Pretendard"/>
+              </a:rPr>
+              <a:t>status 의 connector.state·tasks[0].state 가 RUNNING</a:t>
+            </a:r>
+          </a:p>
+        </p:txBody>
+      </p:sp>
+      <p:sp>
+        <p:nvSpPr>
+          <p:cNvPr id="20" name="Rounded Rectangle 19"/>
+          <p:cNvSpPr/>
+          <p:nvPr/>
+        </p:nvSpPr>
+        <p:spPr>
+          <a:xfrm>
+            <a:off x="1143000" y="5438775"/>
+            <a:ext cx="16002000" cy="742950"/>
+          </a:xfrm>
+          <a:prstGeom prst="roundRect">
+            <a:avLst>
+              <a:gd name="adj" fmla="val 6410"/>
+            </a:avLst>
+          </a:prstGeom>
+          <a:solidFill>
+            <a:srgbClr val="FAFBFD"/>
+          </a:solidFill>
+          <a:ln w="9525">
+            <a:solidFill>
+              <a:srgbClr val="DCE1E8"/>
+            </a:solidFill>
+          </a:ln>
+          <a:effectLst/>
+        </p:spPr>
+        <p:txBody>
+          <a:bodyPr rtlCol="0" anchor="ctr" wrap="square"/>
+          <a:lstStyle/>
+          <a:p>
+            <a:pPr algn="ctr"/>
+          </a:p>
+        </p:txBody>
+      </p:sp>
+      <p:sp>
+        <p:nvSpPr>
+          <p:cNvPr id="21" name="Oval 20"/>
+          <p:cNvSpPr/>
+          <p:nvPr/>
+        </p:nvSpPr>
+        <p:spPr>
+          <a:xfrm>
+            <a:off x="1390650" y="5543550"/>
+            <a:ext cx="533400" cy="533400"/>
+          </a:xfrm>
+          <a:prstGeom prst="ellipse">
+            <a:avLst/>
+          </a:prstGeom>
+          <a:solidFill>
+            <a:srgbClr val="0D2B5E"/>
+          </a:solidFill>
+          <a:ln>
+            <a:noFill/>
+          </a:ln>
+          <a:effectLst/>
+        </p:spPr>
+        <p:txBody>
+          <a:bodyPr rtlCol="0" anchor="ctr" wrap="square"/>
+          <a:lstStyle/>
+          <a:p>
+            <a:pPr algn="ctr"/>
+          </a:p>
+        </p:txBody>
+      </p:sp>
+      <p:sp>
+        <p:nvSpPr>
+          <p:cNvPr id="22" name="TextBox 21"/>
+          <p:cNvSpPr txBox="1"/>
+          <p:nvPr/>
+        </p:nvSpPr>
+        <p:spPr>
+          <a:xfrm>
+            <a:off x="1390650" y="5667375"/>
+            <a:ext cx="533400" cy="323850"/>
+          </a:xfrm>
+          <a:prstGeom prst="rect">
+            <a:avLst/>
+          </a:prstGeom>
+          <a:noFill/>
+        </p:spPr>
+        <p:txBody>
+          <a:bodyPr wrap="square" lIns="0" rIns="0" tIns="0" bIns="0" anchor="t">
+            <a:spAutoFit/>
+          </a:bodyPr>
+          <a:lstStyle/>
+          <a:p>
+            <a:pPr algn="ctr">
+              <a:lnSpc>
+                <a:spcPct val="100000"/>
+              </a:lnSpc>
+            </a:pPr>
+            <a:r>
+              <a:rPr sz="2100" b="1">
+                <a:solidFill>
+                  <a:srgbClr val="FFFFFF"/>
+                </a:solidFill>
+                <a:latin typeface="Pretendard"/>
+                <a:ea typeface="Pretendard"/>
+                <a:cs typeface="Pretendard"/>
+              </a:rPr>
+              <a:t>4</a:t>
+            </a:r>
+          </a:p>
+        </p:txBody>
+      </p:sp>
+      <p:sp>
+        <p:nvSpPr>
+          <p:cNvPr id="23" name="TextBox 22"/>
+          <p:cNvSpPr txBox="1"/>
+          <p:nvPr/>
+        </p:nvSpPr>
+        <p:spPr>
+          <a:xfrm>
+            <a:off x="2190750" y="5438775"/>
+            <a:ext cx="14573250" cy="742950"/>
+          </a:xfrm>
+          <a:prstGeom prst="rect">
+            <a:avLst/>
+          </a:prstGeom>
+          <a:noFill/>
+        </p:spPr>
+        <p:txBody>
+          <a:bodyPr wrap="square" lIns="0" rIns="0" tIns="0" bIns="0" anchor="ctr">
+            <a:spAutoFit/>
+          </a:bodyPr>
+          <a:lstStyle/>
+          <a:p>
+            <a:pPr algn="l">
+              <a:lnSpc>
+                <a:spcPct val="100000"/>
+              </a:lnSpc>
+            </a:pPr>
+            <a:r>
+              <a:rPr sz="2100" b="1">
+                <a:solidFill>
+                  <a:srgbClr val="0D2B5E"/>
+                </a:solidFill>
+                <a:latin typeface="Pretendard"/>
+                <a:ea typeface="Pretendard"/>
+                <a:cs typeface="Pretendard"/>
+              </a:rPr>
+              <a:t>토픽 셋 — shop · shop.shop.orders · schema-changes.shop</a:t>
+            </a:r>
+          </a:p>
+        </p:txBody>
+      </p:sp>
+      <p:sp>
+        <p:nvSpPr>
+          <p:cNvPr id="24" name="Rounded Rectangle 23"/>
+          <p:cNvSpPr/>
+          <p:nvPr/>
+        </p:nvSpPr>
+        <p:spPr>
+          <a:xfrm>
+            <a:off x="1143000" y="6296025"/>
+            <a:ext cx="16002000" cy="742950"/>
+          </a:xfrm>
+          <a:prstGeom prst="roundRect">
+            <a:avLst>
+              <a:gd name="adj" fmla="val 6410"/>
+            </a:avLst>
+          </a:prstGeom>
+          <a:solidFill>
+            <a:srgbClr val="FAFBFD"/>
+          </a:solidFill>
+          <a:ln w="9525">
+            <a:solidFill>
+              <a:srgbClr val="DCE1E8"/>
+            </a:solidFill>
+          </a:ln>
+          <a:effectLst/>
+        </p:spPr>
+        <p:txBody>
+          <a:bodyPr rtlCol="0" anchor="ctr" wrap="square"/>
+          <a:lstStyle/>
+          <a:p>
+            <a:pPr algn="ctr"/>
+          </a:p>
+        </p:txBody>
+      </p:sp>
+      <p:sp>
+        <p:nvSpPr>
+          <p:cNvPr id="25" name="Oval 24"/>
+          <p:cNvSpPr/>
+          <p:nvPr/>
+        </p:nvSpPr>
+        <p:spPr>
+          <a:xfrm>
+            <a:off x="1390650" y="6400800"/>
+            <a:ext cx="533400" cy="533400"/>
+          </a:xfrm>
+          <a:prstGeom prst="ellipse">
+            <a:avLst/>
+          </a:prstGeom>
+          <a:solidFill>
+            <a:srgbClr val="0D2B5E"/>
+          </a:solidFill>
+          <a:ln>
+            <a:noFill/>
+          </a:ln>
+          <a:effectLst/>
+        </p:spPr>
+        <p:txBody>
+          <a:bodyPr rtlCol="0" anchor="ctr" wrap="square"/>
+          <a:lstStyle/>
+          <a:p>
+            <a:pPr algn="ctr"/>
+          </a:p>
+        </p:txBody>
+      </p:sp>
+      <p:sp>
+        <p:nvSpPr>
+          <p:cNvPr id="26" name="TextBox 25"/>
+          <p:cNvSpPr txBox="1"/>
+          <p:nvPr/>
+        </p:nvSpPr>
+        <p:spPr>
+          <a:xfrm>
+            <a:off x="1390650" y="6524625"/>
+            <a:ext cx="533400" cy="323850"/>
+          </a:xfrm>
+          <a:prstGeom prst="rect">
+            <a:avLst/>
+          </a:prstGeom>
+          <a:noFill/>
+        </p:spPr>
+        <p:txBody>
+          <a:bodyPr wrap="square" lIns="0" rIns="0" tIns="0" bIns="0" anchor="t">
+            <a:spAutoFit/>
+          </a:bodyPr>
+          <a:lstStyle/>
+          <a:p>
+            <a:pPr algn="ctr">
+              <a:lnSpc>
+                <a:spcPct val="100000"/>
+              </a:lnSpc>
+            </a:pPr>
+            <a:r>
+              <a:rPr sz="2100" b="1">
+                <a:solidFill>
+                  <a:srgbClr val="FFFFFF"/>
+                </a:solidFill>
+                <a:latin typeface="Pretendard"/>
+                <a:ea typeface="Pretendard"/>
+                <a:cs typeface="Pretendard"/>
+              </a:rPr>
+              <a:t>5</a:t>
+            </a:r>
+          </a:p>
+        </p:txBody>
+      </p:sp>
+      <p:sp>
+        <p:nvSpPr>
+          <p:cNvPr id="27" name="TextBox 26"/>
+          <p:cNvSpPr txBox="1"/>
+          <p:nvPr/>
+        </p:nvSpPr>
+        <p:spPr>
+          <a:xfrm>
+            <a:off x="2190750" y="6296025"/>
+            <a:ext cx="14573250" cy="742950"/>
+          </a:xfrm>
+          <a:prstGeom prst="rect">
+            <a:avLst/>
+          </a:prstGeom>
+          <a:noFill/>
+        </p:spPr>
+        <p:txBody>
+          <a:bodyPr wrap="square" lIns="0" rIns="0" tIns="0" bIns="0" anchor="ctr">
+            <a:spAutoFit/>
+          </a:bodyPr>
+          <a:lstStyle/>
+          <a:p>
+            <a:pPr algn="l">
+              <a:lnSpc>
+                <a:spcPct val="100000"/>
+              </a:lnSpc>
+            </a:pPr>
+            <a:r>
+              <a:rPr sz="2100" b="1">
+                <a:solidFill>
+                  <a:srgbClr val="0D2B5E"/>
+                </a:solidFill>
+                <a:latin typeface="Pretendard"/>
+                <a:ea typeface="Pretendard"/>
+                <a:cs typeface="Pretendard"/>
+              </a:rPr>
+              <a:t>op=r → c · u(CREATED→PAID) · d(after=null) · 툼스톤</a:t>
+            </a:r>
+          </a:p>
+        </p:txBody>
+      </p:sp>
+      <p:sp>
+        <p:nvSpPr>
+          <p:cNvPr id="28" name="Rounded Rectangle 27"/>
+          <p:cNvSpPr/>
+          <p:nvPr/>
+        </p:nvSpPr>
+        <p:spPr>
+          <a:xfrm>
+            <a:off x="1143000" y="7153275"/>
+            <a:ext cx="16002000" cy="742950"/>
+          </a:xfrm>
+          <a:prstGeom prst="roundRect">
+            <a:avLst>
+              <a:gd name="adj" fmla="val 6410"/>
+            </a:avLst>
+          </a:prstGeom>
+          <a:solidFill>
+            <a:srgbClr val="FAFBFD"/>
+          </a:solidFill>
+          <a:ln w="9525">
+            <a:solidFill>
+              <a:srgbClr val="DCE1E8"/>
+            </a:solidFill>
+          </a:ln>
+          <a:effectLst/>
+        </p:spPr>
+        <p:txBody>
+          <a:bodyPr rtlCol="0" anchor="ctr" wrap="square"/>
+          <a:lstStyle/>
+          <a:p>
+            <a:pPr algn="ctr"/>
+          </a:p>
+        </p:txBody>
+      </p:sp>
+      <p:sp>
+        <p:nvSpPr>
+          <p:cNvPr id="29" name="Oval 28"/>
+          <p:cNvSpPr/>
+          <p:nvPr/>
+        </p:nvSpPr>
+        <p:spPr>
+          <a:xfrm>
+            <a:off x="1390650" y="7258050"/>
+            <a:ext cx="533400" cy="533400"/>
+          </a:xfrm>
+          <a:prstGeom prst="ellipse">
+            <a:avLst/>
+          </a:prstGeom>
+          <a:solidFill>
+            <a:srgbClr val="0D2B5E"/>
+          </a:solidFill>
+          <a:ln>
+            <a:noFill/>
+          </a:ln>
+          <a:effectLst/>
+        </p:spPr>
+        <p:txBody>
+          <a:bodyPr rtlCol="0" anchor="ctr" wrap="square"/>
+          <a:lstStyle/>
+          <a:p>
+            <a:pPr algn="ctr"/>
+          </a:p>
+        </p:txBody>
+      </p:sp>
+      <p:sp>
+        <p:nvSpPr>
+          <p:cNvPr id="30" name="TextBox 29"/>
+          <p:cNvSpPr txBox="1"/>
+          <p:nvPr/>
+        </p:nvSpPr>
+        <p:spPr>
+          <a:xfrm>
+            <a:off x="1390650" y="7381875"/>
+            <a:ext cx="533400" cy="323850"/>
+          </a:xfrm>
+          <a:prstGeom prst="rect">
+            <a:avLst/>
+          </a:prstGeom>
+          <a:noFill/>
+        </p:spPr>
+        <p:txBody>
+          <a:bodyPr wrap="square" lIns="0" rIns="0" tIns="0" bIns="0" anchor="t">
+            <a:spAutoFit/>
+          </a:bodyPr>
+          <a:lstStyle/>
+          <a:p>
+            <a:pPr algn="ctr">
+              <a:lnSpc>
+                <a:spcPct val="100000"/>
+              </a:lnSpc>
+            </a:pPr>
+            <a:r>
+              <a:rPr sz="2100" b="1">
+                <a:solidFill>
+                  <a:srgbClr val="FFFFFF"/>
+                </a:solidFill>
+                <a:latin typeface="Pretendard"/>
+                <a:ea typeface="Pretendard"/>
+                <a:cs typeface="Pretendard"/>
+              </a:rPr>
+              <a:t>6</a:t>
+            </a:r>
+          </a:p>
+        </p:txBody>
+      </p:sp>
+      <p:sp>
+        <p:nvSpPr>
+          <p:cNvPr id="31" name="TextBox 30"/>
+          <p:cNvSpPr txBox="1"/>
+          <p:nvPr/>
+        </p:nvSpPr>
+        <p:spPr>
+          <a:xfrm>
+            <a:off x="2190750" y="7153275"/>
+            <a:ext cx="14573250" cy="742950"/>
+          </a:xfrm>
+          <a:prstGeom prst="rect">
+            <a:avLst/>
+          </a:prstGeom>
+          <a:noFill/>
+        </p:spPr>
+        <p:txBody>
+          <a:bodyPr wrap="square" lIns="0" rIns="0" tIns="0" bIns="0" anchor="ctr">
+            <a:spAutoFit/>
+          </a:bodyPr>
+          <a:lstStyle/>
+          <a:p>
+            <a:pPr algn="l">
+              <a:lnSpc>
+                <a:spcPct val="100000"/>
+              </a:lnSpc>
+            </a:pPr>
+            <a:r>
+              <a:rPr sz="2100" b="1">
+                <a:solidFill>
+                  <a:srgbClr val="0D2B5E"/>
+                </a:solidFill>
+                <a:latin typeface="Pretendard"/>
+                <a:ea typeface="Pretendard"/>
+                <a:cs typeface="Pretendard"/>
+              </a:rPr>
+              <a:t>cdc_reader 에 네 종류 + 툼스톤 · 7단계는 INSERT 2 · UPDATE 4</a:t>
+            </a:r>
+          </a:p>
+        </p:txBody>
+      </p:sp>
+      <p:sp>
+        <p:nvSpPr>
+          <p:cNvPr id="32" name="Rectangle 31"/>
+          <p:cNvSpPr/>
+          <p:nvPr/>
+        </p:nvSpPr>
+        <p:spPr>
+          <a:xfrm>
+            <a:off x="1143000" y="8058150"/>
+            <a:ext cx="16002000" cy="9525"/>
+          </a:xfrm>
+          <a:prstGeom prst="rect">
+            <a:avLst/>
+          </a:prstGeom>
+          <a:solidFill>
+            <a:srgbClr val="DCE1E8"/>
+          </a:solidFill>
+          <a:ln>
+            <a:noFill/>
+          </a:ln>
+          <a:effectLst/>
+        </p:spPr>
+        <p:txBody>
+          <a:bodyPr rtlCol="0" anchor="ctr" wrap="square"/>
+          <a:lstStyle/>
+          <a:p>
+            <a:pPr algn="ctr"/>
+          </a:p>
+        </p:txBody>
+      </p:sp>
+      <p:sp>
+        <p:nvSpPr>
+          <p:cNvPr id="33" name="TextBox 32"/>
+          <p:cNvSpPr txBox="1"/>
+          <p:nvPr/>
+        </p:nvSpPr>
+        <p:spPr>
+          <a:xfrm>
+            <a:off x="1143000" y="8248650"/>
+            <a:ext cx="13335000" cy="323850"/>
+          </a:xfrm>
+          <a:prstGeom prst="rect">
+            <a:avLst/>
+          </a:prstGeom>
+          <a:noFill/>
+        </p:spPr>
+        <p:txBody>
+          <a:bodyPr wrap="square" lIns="0" rIns="0" tIns="0" bIns="0" anchor="t">
+            <a:spAutoFit/>
+          </a:bodyPr>
+          <a:lstStyle/>
+          <a:p>
+            <a:pPr algn="l">
+              <a:lnSpc>
+                <a:spcPct val="100000"/>
+              </a:lnSpc>
+            </a:pPr>
+            <a:r>
+              <a:rPr sz="1725" b="0">
+                <a:solidFill>
+                  <a:srgbClr val="7D7D7D"/>
+                </a:solidFill>
+                <a:latin typeface="Pretendard"/>
+                <a:ea typeface="Pretendard"/>
+                <a:cs typeface="Pretendard"/>
+              </a:rPr>
+              <a:t>데이터 엔지니어링 &amp; RAG 파이프라인 160H · 6-4 · 실습 2.5H</a:t>
+            </a:r>
+          </a:p>
+        </p:txBody>
+      </p:sp>
+      <p:sp>
+        <p:nvSpPr>
+          <p:cNvPr id="34" name="TextBox 33"/>
+          <p:cNvSpPr txBox="1"/>
+          <p:nvPr/>
+        </p:nvSpPr>
+        <p:spPr>
+          <a:xfrm>
+            <a:off x="15240000" y="8248650"/>
+            <a:ext cx="1905000" cy="323850"/>
+          </a:xfrm>
+          <a:prstGeom prst="rect">
+            <a:avLst/>
+          </a:prstGeom>
+          <a:noFill/>
+        </p:spPr>
+        <p:txBody>
+          <a:bodyPr wrap="square" lIns="0" rIns="0" tIns="0" bIns="0" anchor="t">
+            <a:spAutoFit/>
+          </a:bodyPr>
+          <a:lstStyle/>
+          <a:p>
+            <a:pPr algn="r">
+              <a:lnSpc>
+                <a:spcPct val="100000"/>
+              </a:lnSpc>
+            </a:pPr>
+            <a:r>
+              <a:rPr sz="1725" b="0">
+                <a:solidFill>
+                  <a:srgbClr val="7D7D7D"/>
+                </a:solidFill>
+                <a:latin typeface="Pretendard"/>
+                <a:ea typeface="Pretendard"/>
+                <a:cs typeface="Pretendard"/>
+              </a:rPr>
+              <a:t>11</a:t>
+            </a:r>
+          </a:p>
+        </p:txBody>
+      </p:sp>
+    </p:spTree>
+  </p:cSld>
+  <p:clrMapOvr>
+    <a:masterClrMapping/>
+  </p:clrMapOvr>
+</p:sld>
+</file>
+
+<file path=ppt/slides/slide12.xml><?xml version="1.0" encoding="utf-8"?>
+<p:sld xmlns:a="http://schemas.openxmlformats.org/drawingml/2006/main" xmlns:p="http://schemas.openxmlformats.org/presentationml/2006/main" xmlns:r="http://schemas.openxmlformats.org/officeDocument/2006/relationships">
+  <p:cSld>
+    <p:spTree>
+      <p:nvGrpSpPr>
+        <p:cNvPr id="1" name=""/>
+        <p:cNvGrpSpPr/>
+        <p:nvPr/>
+      </p:nvGrpSpPr>
+      <p:grpSpPr/>
+      <p:sp>
+        <p:nvSpPr>
+          <p:cNvPr id="2" name="deckgen:decor"/>
           <p:cNvSpPr/>
           <p:nvPr/>
         </p:nvSpPr>
@@ -4838,7 +5900,7 @@
       </p:sp>
       <p:sp>
         <p:nvSpPr>
-          <p:cNvPr id="3" name="Oval 2"/>
+          <p:cNvPr id="3" name="deckgen:decor"/>
           <p:cNvSpPr/>
           <p:nvPr/>
         </p:nvSpPr>
@@ -5061,7 +6123,7 @@
         </p:nvSpPr>
         <p:spPr>
           <a:xfrm>
-            <a:off x="1428750" y="5486400"/>
+            <a:off x="1428750" y="5476875"/>
             <a:ext cx="419100" cy="381000"/>
           </a:xfrm>
           <a:prstGeom prst="rect">
@@ -5102,7 +6164,7 @@
         </p:nvSpPr>
         <p:spPr>
           <a:xfrm>
-            <a:off x="1905000" y="5486400"/>
+            <a:off x="1905000" y="5476875"/>
             <a:ext cx="6724650" cy="381000"/>
           </a:xfrm>
           <a:prstGeom prst="rect">
@@ -5177,7 +6239,7 @@
         </p:nvSpPr>
         <p:spPr>
           <a:xfrm>
-            <a:off x="9658350" y="5486400"/>
+            <a:off x="9658350" y="5476875"/>
             <a:ext cx="419100" cy="381000"/>
           </a:xfrm>
           <a:prstGeom prst="rect">
@@ -5218,7 +6280,7 @@
         </p:nvSpPr>
         <p:spPr>
           <a:xfrm>
-            <a:off x="10134600" y="5486400"/>
+            <a:off x="10134600" y="5476875"/>
             <a:ext cx="6724650" cy="381000"/>
           </a:xfrm>
           <a:prstGeom prst="rect">
@@ -5293,7 +6355,7 @@
         </p:nvSpPr>
         <p:spPr>
           <a:xfrm>
-            <a:off x="1428750" y="6515100"/>
+            <a:off x="1428750" y="6505575"/>
             <a:ext cx="419100" cy="381000"/>
           </a:xfrm>
           <a:prstGeom prst="rect">
@@ -5334,7 +6396,7 @@
         </p:nvSpPr>
         <p:spPr>
           <a:xfrm>
-            <a:off x="1905000" y="6515100"/>
+            <a:off x="1905000" y="6505575"/>
             <a:ext cx="6724650" cy="381000"/>
           </a:xfrm>
           <a:prstGeom prst="rect">
@@ -5409,7 +6471,7 @@
         </p:nvSpPr>
         <p:spPr>
           <a:xfrm>
-            <a:off x="9658350" y="6515100"/>
+            <a:off x="9658350" y="6505575"/>
             <a:ext cx="419100" cy="381000"/>
           </a:xfrm>
           <a:prstGeom prst="rect">
@@ -5450,7 +6512,7 @@
         </p:nvSpPr>
         <p:spPr>
           <a:xfrm>
-            <a:off x="10134600" y="6515100"/>
+            <a:off x="10134600" y="6505575"/>
             <a:ext cx="6724650" cy="381000"/>
           </a:xfrm>
           <a:prstGeom prst="rect">
@@ -5615,7 +6677,7 @@
       <p:grpSpPr/>
       <p:sp>
         <p:nvSpPr>
-          <p:cNvPr id="2" name="Oval 1"/>
+          <p:cNvPr id="2" name="deckgen:decor"/>
           <p:cNvSpPr/>
           <p:nvPr/>
         </p:nvSpPr>
@@ -5645,7 +6707,7 @@
       </p:sp>
       <p:sp>
         <p:nvSpPr>
-          <p:cNvPr id="3" name="Oval 2"/>
+          <p:cNvPr id="3" name="deckgen:decor"/>
           <p:cNvSpPr/>
           <p:nvPr/>
         </p:nvSpPr>
@@ -5675,7 +6737,7 @@
       </p:sp>
       <p:sp>
         <p:nvSpPr>
-          <p:cNvPr id="4" name="Oval 3"/>
+          <p:cNvPr id="4" name="deckgen:decor"/>
           <p:cNvSpPr/>
           <p:nvPr/>
         </p:nvSpPr>
@@ -5956,7 +7018,7 @@
                 <a:ea typeface="Pretendard"/>
                 <a:cs typeface="Pretendard"/>
               </a:rPr>
-              <a:t>compose 에 mysql·connect 를 추가하고 binlog 설정을 확인한다</a:t>
+              <a:t>mysql·connect 를 더한 compose 로 다시 쓰고 binlog 설정을 확인한다</a:t>
             </a:r>
           </a:p>
         </p:txBody>
@@ -6469,7 +7531,7 @@
                 <a:ea typeface="Pretendard"/>
                 <a:cs typeface="Pretendard"/>
               </a:rPr>
-              <a:t>일부러 호스트명을 localhost 로 틀려 FAILED 의 trace 를 읽어 봅니다</a:t>
+              <a:t>일부러 decimal 설정 · 툼스톤 처리를 빼 보고 무엇이 깨지는지 봅니다</a:t>
             </a:r>
           </a:p>
         </p:txBody>
@@ -6606,7 +7668,7 @@
       <p:grpSpPr/>
       <p:sp>
         <p:nvSpPr>
-          <p:cNvPr id="2" name="Oval 1"/>
+          <p:cNvPr id="2" name="deckgen:decor"/>
           <p:cNvSpPr/>
           <p:nvPr/>
         </p:nvSpPr>
@@ -6636,7 +7698,7 @@
       </p:sp>
       <p:sp>
         <p:nvSpPr>
-          <p:cNvPr id="3" name="Oval 2"/>
+          <p:cNvPr id="3" name="deckgen:decor"/>
           <p:cNvSpPr/>
           <p:nvPr/>
         </p:nvSpPr>
@@ -6666,7 +7728,7 @@
       </p:sp>
       <p:sp>
         <p:nvSpPr>
-          <p:cNvPr id="4" name="Oval 3"/>
+          <p:cNvPr id="4" name="deckgen:decor"/>
           <p:cNvSpPr/>
           <p:nvPr/>
         </p:nvSpPr>
@@ -6771,7 +7833,7 @@
                 <a:ea typeface="Pretendard"/>
                 <a:cs typeface="Pretendard"/>
               </a:rPr>
-              <a:t>일곱 단계 — compose 추가부터 파이썬 정리까지</a:t>
+              <a:t>일곱 단계 — compose 다시 쓰기부터 파이썬 정리까지</a:t>
             </a:r>
           </a:p>
         </p:txBody>
@@ -6842,7 +7904,7 @@
                 <a:ea typeface="Pretendard"/>
                 <a:cs typeface="Pretendard"/>
               </a:rPr>
-              <a:t>6-2 의 compose 가 떠 있는 ~/data-eng/week6 에서 시작합니다 — kafka 서비스는 그대로 둡니다</a:t>
+              <a:t>~/data-eng/week6 에서 시작 — kafka 는 그대로, compose 파일 전체를 다시 씁니다</a:t>
             </a:r>
           </a:p>
         </p:txBody>
@@ -6988,7 +8050,7 @@
                 <a:ea typeface="Pretendard"/>
                 <a:cs typeface="Pretendard"/>
               </a:rPr>
-              <a:t>mysql · connect</a:t>
+              <a:t>compose 다시 쓰기</a:t>
             </a:r>
           </a:p>
           <a:p>
@@ -7799,7 +8861,7 @@
       <p:grpSpPr/>
       <p:sp>
         <p:nvSpPr>
-          <p:cNvPr id="2" name="Oval 1"/>
+          <p:cNvPr id="2" name="deckgen:decor"/>
           <p:cNvSpPr/>
           <p:nvPr/>
         </p:nvSpPr>
@@ -7829,7 +8891,7 @@
       </p:sp>
       <p:sp>
         <p:nvSpPr>
-          <p:cNvPr id="3" name="Oval 2"/>
+          <p:cNvPr id="3" name="deckgen:decor"/>
           <p:cNvSpPr/>
           <p:nvPr/>
         </p:nvSpPr>
@@ -7859,7 +8921,7 @@
       </p:sp>
       <p:sp>
         <p:nvSpPr>
-          <p:cNvPr id="4" name="Oval 3"/>
+          <p:cNvPr id="4" name="deckgen:decor"/>
           <p:cNvSpPr/>
           <p:nvPr/>
         </p:nvSpPr>
@@ -7964,7 +9026,7 @@
                 <a:ea typeface="Pretendard"/>
                 <a:cs typeface="Pretendard"/>
               </a:rPr>
-              <a:t>mysql·connect 추가와 binlog 확인</a:t>
+              <a:t>compose 다시 쓰기와 binlog 확인</a:t>
             </a:r>
           </a:p>
         </p:txBody>
@@ -8008,7 +9070,7 @@
         <p:spPr>
           <a:xfrm>
             <a:off x="1143000" y="2781300"/>
-            <a:ext cx="1783687" cy="571500"/>
+            <a:ext cx="2231493" cy="571500"/>
           </a:xfrm>
           <a:prstGeom prst="rect">
             <a:avLst/>
@@ -8038,7 +9100,7 @@
         <p:spPr>
           <a:xfrm>
             <a:off x="1143000" y="2781300"/>
-            <a:ext cx="1783687" cy="571500"/>
+            <a:ext cx="2231493" cy="571500"/>
           </a:xfrm>
           <a:prstGeom prst="rect">
             <a:avLst/>
@@ -8065,7 +9127,7 @@
                 <a:ea typeface="Pretendard"/>
                 <a:cs typeface="Pretendard"/>
               </a:rPr>
-              <a:t>compose 추가</a:t>
+              <a:t>compose 다시 쓰기</a:t>
             </a:r>
           </a:p>
         </p:txBody>
@@ -8078,8 +9140,8 @@
         </p:nvSpPr>
         <p:spPr>
           <a:xfrm>
-            <a:off x="2926687" y="2781300"/>
-            <a:ext cx="14218313" cy="571500"/>
+            <a:off x="3374493" y="2781300"/>
+            <a:ext cx="13770507" cy="571500"/>
           </a:xfrm>
           <a:prstGeom prst="rect">
             <a:avLst/>
@@ -8110,8 +9172,8 @@
         </p:nvSpPr>
         <p:spPr>
           <a:xfrm>
-            <a:off x="3079087" y="2781300"/>
-            <a:ext cx="13913513" cy="571500"/>
+            <a:off x="3526893" y="2781300"/>
+            <a:ext cx="13465707" cy="571500"/>
           </a:xfrm>
           <a:prstGeom prst="rect">
             <a:avLst/>
@@ -8138,7 +9200,7 @@
                 <a:ea typeface="Pretendard"/>
                 <a:cs typeface="Pretendard"/>
               </a:rPr>
-              <a:t>mysql:8.0 · debezium/connect:2.7.3.Final</a:t>
+              <a:t>cat &gt; docker-compose.yml &lt;&lt; 'EOF' … EOF</a:t>
             </a:r>
           </a:p>
         </p:txBody>
@@ -8152,7 +9214,7 @@
         <p:spPr>
           <a:xfrm>
             <a:off x="1143000" y="3429000"/>
-            <a:ext cx="1783687" cy="571500"/>
+            <a:ext cx="2231493" cy="571500"/>
           </a:xfrm>
           <a:prstGeom prst="rect">
             <a:avLst/>
@@ -8182,7 +9244,7 @@
         <p:spPr>
           <a:xfrm>
             <a:off x="1143000" y="3429000"/>
-            <a:ext cx="1783687" cy="571500"/>
+            <a:ext cx="2231493" cy="571500"/>
           </a:xfrm>
           <a:prstGeom prst="rect">
             <a:avLst/>
@@ -8209,7 +9271,7 @@
                 <a:ea typeface="Pretendard"/>
                 <a:cs typeface="Pretendard"/>
               </a:rPr>
-              <a:t>기동</a:t>
+              <a:t>서비스</a:t>
             </a:r>
           </a:p>
         </p:txBody>
@@ -8222,8 +9284,8 @@
         </p:nvSpPr>
         <p:spPr>
           <a:xfrm>
-            <a:off x="2926687" y="3429000"/>
-            <a:ext cx="14218313" cy="571500"/>
+            <a:off x="3374493" y="3429000"/>
+            <a:ext cx="13770507" cy="571500"/>
           </a:xfrm>
           <a:prstGeom prst="rect">
             <a:avLst/>
@@ -8254,8 +9316,8 @@
         </p:nvSpPr>
         <p:spPr>
           <a:xfrm>
-            <a:off x="3079087" y="3429000"/>
-            <a:ext cx="13913513" cy="571500"/>
+            <a:off x="3526893" y="3429000"/>
+            <a:ext cx="13465707" cy="571500"/>
           </a:xfrm>
           <a:prstGeom prst="rect">
             <a:avLst/>
@@ -8282,7 +9344,7 @@
                 <a:ea typeface="Pretendard"/>
                 <a:cs typeface="Pretendard"/>
               </a:rPr>
-              <a:t>docker compose up -d → docker compose ps</a:t>
+              <a:t>kafka · mysql:8.0 · debezium/connect:2.7.3.Final</a:t>
             </a:r>
           </a:p>
         </p:txBody>
@@ -8296,7 +9358,7 @@
         <p:spPr>
           <a:xfrm>
             <a:off x="1143000" y="4076700"/>
-            <a:ext cx="1783687" cy="571500"/>
+            <a:ext cx="2231493" cy="571500"/>
           </a:xfrm>
           <a:prstGeom prst="rect">
             <a:avLst/>
@@ -8326,7 +9388,7 @@
         <p:spPr>
           <a:xfrm>
             <a:off x="1143000" y="4076700"/>
-            <a:ext cx="1783687" cy="571500"/>
+            <a:ext cx="2231493" cy="571500"/>
           </a:xfrm>
           <a:prstGeom prst="rect">
             <a:avLst/>
@@ -8353,7 +9415,7 @@
                 <a:ea typeface="Pretendard"/>
                 <a:cs typeface="Pretendard"/>
               </a:rPr>
-              <a:t>binlog 확인</a:t>
+              <a:t>기동</a:t>
             </a:r>
           </a:p>
         </p:txBody>
@@ -8366,8 +9428,8 @@
         </p:nvSpPr>
         <p:spPr>
           <a:xfrm>
-            <a:off x="2926687" y="4076700"/>
-            <a:ext cx="14218313" cy="571500"/>
+            <a:off x="3374493" y="4076700"/>
+            <a:ext cx="13770507" cy="571500"/>
           </a:xfrm>
           <a:prstGeom prst="rect">
             <a:avLst/>
@@ -8398,8 +9460,8 @@
         </p:nvSpPr>
         <p:spPr>
           <a:xfrm>
-            <a:off x="3079087" y="4076700"/>
-            <a:ext cx="13913513" cy="571500"/>
+            <a:off x="3526893" y="4076700"/>
+            <a:ext cx="13465707" cy="571500"/>
           </a:xfrm>
           <a:prstGeom prst="rect">
             <a:avLst/>
@@ -8426,7 +9488,7 @@
                 <a:ea typeface="Pretendard"/>
                 <a:cs typeface="Pretendard"/>
               </a:rPr>
-              <a:t>SHOW VARIABLES LIKE 'log_bin' / 'binlog_format'</a:t>
+              <a:t>docker compose up -d → kafka Running · 둘 Started</a:t>
             </a:r>
           </a:p>
         </p:txBody>
@@ -8440,7 +9502,7 @@
         <p:spPr>
           <a:xfrm>
             <a:off x="1143000" y="4724400"/>
-            <a:ext cx="1783687" cy="571500"/>
+            <a:ext cx="2231493" cy="571500"/>
           </a:xfrm>
           <a:prstGeom prst="rect">
             <a:avLst/>
@@ -8470,7 +9532,7 @@
         <p:spPr>
           <a:xfrm>
             <a:off x="1143000" y="4724400"/>
-            <a:ext cx="1783687" cy="571500"/>
+            <a:ext cx="2231493" cy="571500"/>
           </a:xfrm>
           <a:prstGeom prst="rect">
             <a:avLst/>
@@ -8497,7 +9559,7 @@
                 <a:ea typeface="Pretendard"/>
                 <a:cs typeface="Pretendard"/>
               </a:rPr>
-              <a:t>Connect 응답</a:t>
+              <a:t>binlog 확인</a:t>
             </a:r>
           </a:p>
         </p:txBody>
@@ -8510,8 +9572,8 @@
         </p:nvSpPr>
         <p:spPr>
           <a:xfrm>
-            <a:off x="2926687" y="4724400"/>
-            <a:ext cx="14218313" cy="571500"/>
+            <a:off x="3374493" y="4724400"/>
+            <a:ext cx="13770507" cy="571500"/>
           </a:xfrm>
           <a:prstGeom prst="rect">
             <a:avLst/>
@@ -8542,8 +9604,8 @@
         </p:nvSpPr>
         <p:spPr>
           <a:xfrm>
-            <a:off x="3079087" y="4724400"/>
-            <a:ext cx="13913513" cy="571500"/>
+            <a:off x="3526893" y="4724400"/>
+            <a:ext cx="13465707" cy="571500"/>
           </a:xfrm>
           <a:prstGeom prst="rect">
             <a:avLst/>
@@ -8570,7 +9632,7 @@
                 <a:ea typeface="Pretendard"/>
                 <a:cs typeface="Pretendard"/>
               </a:rPr>
-              <a:t>curl -s http://localhost:8083/ | head -c 200</a:t>
+              <a:t>log_bin=ON · binlog_format=ROW</a:t>
             </a:r>
           </a:p>
         </p:txBody>
@@ -8584,7 +9646,7 @@
         <p:spPr>
           <a:xfrm>
             <a:off x="1143000" y="5372100"/>
-            <a:ext cx="1783687" cy="571500"/>
+            <a:ext cx="2231493" cy="571500"/>
           </a:xfrm>
           <a:prstGeom prst="rect">
             <a:avLst/>
@@ -8614,7 +9676,7 @@
         <p:spPr>
           <a:xfrm>
             <a:off x="1143000" y="5372100"/>
-            <a:ext cx="1783687" cy="571500"/>
+            <a:ext cx="2231493" cy="571500"/>
           </a:xfrm>
           <a:prstGeom prst="rect">
             <a:avLst/>
@@ -8641,7 +9703,7 @@
                 <a:ea typeface="Pretendard"/>
                 <a:cs typeface="Pretendard"/>
               </a:rPr>
-              <a:t>플러그인</a:t>
+              <a:t>Connect 응답</a:t>
             </a:r>
           </a:p>
         </p:txBody>
@@ -8654,8 +9716,8 @@
         </p:nvSpPr>
         <p:spPr>
           <a:xfrm>
-            <a:off x="2926687" y="5372100"/>
-            <a:ext cx="14218313" cy="571500"/>
+            <a:off x="3374493" y="5372100"/>
+            <a:ext cx="13770507" cy="571500"/>
           </a:xfrm>
           <a:prstGeom prst="rect">
             <a:avLst/>
@@ -8686,8 +9748,8 @@
         </p:nvSpPr>
         <p:spPr>
           <a:xfrm>
-            <a:off x="3079087" y="5372100"/>
-            <a:ext cx="13913513" cy="571500"/>
+            <a:off x="3526893" y="5372100"/>
+            <a:ext cx="13465707" cy="571500"/>
           </a:xfrm>
           <a:prstGeom prst="rect">
             <a:avLst/>
@@ -8714,14 +9776,158 @@
                 <a:ea typeface="Pretendard"/>
                 <a:cs typeface="Pretendard"/>
               </a:rPr>
-              <a:t>curl -s …/connector-plugins | grep "class"</a:t>
-            </a:r>
-          </a:p>
-        </p:txBody>
-      </p:sp>
-      <p:sp>
-        <p:nvSpPr>
-          <p:cNvPr id="28" name="TextBox 27"/>
+              <a:t>curl … :8083/ → {"version":"3.7.0", …}</a:t>
+            </a:r>
+          </a:p>
+        </p:txBody>
+      </p:sp>
+      <p:sp>
+        <p:nvSpPr>
+          <p:cNvPr id="28" name="Rectangle 27"/>
+          <p:cNvSpPr/>
+          <p:nvPr/>
+        </p:nvSpPr>
+        <p:spPr>
+          <a:xfrm>
+            <a:off x="1143000" y="6019800"/>
+            <a:ext cx="2231493" cy="571500"/>
+          </a:xfrm>
+          <a:prstGeom prst="rect">
+            <a:avLst/>
+          </a:prstGeom>
+          <a:solidFill>
+            <a:srgbClr val="0D2B5E"/>
+          </a:solidFill>
+          <a:ln>
+            <a:noFill/>
+          </a:ln>
+          <a:effectLst/>
+        </p:spPr>
+        <p:txBody>
+          <a:bodyPr rtlCol="0" anchor="ctr" wrap="square"/>
+          <a:lstStyle/>
+          <a:p>
+            <a:pPr algn="ctr"/>
+          </a:p>
+        </p:txBody>
+      </p:sp>
+      <p:sp>
+        <p:nvSpPr>
+          <p:cNvPr id="29" name="TextBox 28"/>
+          <p:cNvSpPr txBox="1"/>
+          <p:nvPr/>
+        </p:nvSpPr>
+        <p:spPr>
+          <a:xfrm>
+            <a:off x="1143000" y="6019800"/>
+            <a:ext cx="2231493" cy="571500"/>
+          </a:xfrm>
+          <a:prstGeom prst="rect">
+            <a:avLst/>
+          </a:prstGeom>
+          <a:noFill/>
+        </p:spPr>
+        <p:txBody>
+          <a:bodyPr wrap="square" lIns="0" rIns="0" tIns="0" bIns="0" anchor="ctr">
+            <a:spAutoFit/>
+          </a:bodyPr>
+          <a:lstStyle/>
+          <a:p>
+            <a:pPr algn="ctr">
+              <a:lnSpc>
+                <a:spcPct val="100000"/>
+              </a:lnSpc>
+            </a:pPr>
+            <a:r>
+              <a:rPr sz="1800" b="1">
+                <a:solidFill>
+                  <a:srgbClr val="FFFFFF"/>
+                </a:solidFill>
+                <a:latin typeface="Pretendard"/>
+                <a:ea typeface="Pretendard"/>
+                <a:cs typeface="Pretendard"/>
+              </a:rPr>
+              <a:t>플러그인</a:t>
+            </a:r>
+          </a:p>
+        </p:txBody>
+      </p:sp>
+      <p:sp>
+        <p:nvSpPr>
+          <p:cNvPr id="30" name="Rectangle 29"/>
+          <p:cNvSpPr/>
+          <p:nvPr/>
+        </p:nvSpPr>
+        <p:spPr>
+          <a:xfrm>
+            <a:off x="3374493" y="6019800"/>
+            <a:ext cx="13770507" cy="571500"/>
+          </a:xfrm>
+          <a:prstGeom prst="rect">
+            <a:avLst/>
+          </a:prstGeom>
+          <a:solidFill>
+            <a:srgbClr val="FAFBFD"/>
+          </a:solidFill>
+          <a:ln w="9525">
+            <a:solidFill>
+              <a:srgbClr val="DCE1E8"/>
+            </a:solidFill>
+          </a:ln>
+          <a:effectLst/>
+        </p:spPr>
+        <p:txBody>
+          <a:bodyPr rtlCol="0" anchor="ctr" wrap="square"/>
+          <a:lstStyle/>
+          <a:p>
+            <a:pPr algn="ctr"/>
+          </a:p>
+        </p:txBody>
+      </p:sp>
+      <p:sp>
+        <p:nvSpPr>
+          <p:cNvPr id="31" name="TextBox 30"/>
+          <p:cNvSpPr txBox="1"/>
+          <p:nvPr/>
+        </p:nvSpPr>
+        <p:spPr>
+          <a:xfrm>
+            <a:off x="3526893" y="6019800"/>
+            <a:ext cx="13465707" cy="571500"/>
+          </a:xfrm>
+          <a:prstGeom prst="rect">
+            <a:avLst/>
+          </a:prstGeom>
+          <a:noFill/>
+        </p:spPr>
+        <p:txBody>
+          <a:bodyPr wrap="square" lIns="0" rIns="0" tIns="0" bIns="0" anchor="ctr">
+            <a:spAutoFit/>
+          </a:bodyPr>
+          <a:lstStyle/>
+          <a:p>
+            <a:pPr algn="l">
+              <a:lnSpc>
+                <a:spcPct val="115000"/>
+              </a:lnSpc>
+            </a:pPr>
+            <a:r>
+              <a:rPr sz="1800" b="0">
+                <a:solidFill>
+                  <a:srgbClr val="3D3D3D"/>
+                </a:solidFill>
+                <a:latin typeface="Pretendard"/>
+                <a:ea typeface="Pretendard"/>
+                <a:cs typeface="Pretendard"/>
+              </a:rPr>
+              <a:t>…/connector-plugins → MySqlConnector 포함 10줄</a:t>
+            </a:r>
+          </a:p>
+        </p:txBody>
+      </p:sp>
+      <p:sp>
+        <p:nvSpPr>
+          <p:cNvPr id="32" name="TextBox 31"/>
           <p:cNvSpPr txBox="1"/>
           <p:nvPr/>
         </p:nvSpPr>
@@ -8755,14 +9961,14 @@
                 <a:ea typeface="Pretendard"/>
                 <a:cs typeface="Pretendard"/>
               </a:rPr>
-              <a:t>기대: log_bin=ON · binlog_format=ROW · 플러그인 목록에 io.debezium.connector.mysql.MySqlConnector — Connect 기동은 수십 초</a:t>
-            </a:r>
-          </a:p>
-        </p:txBody>
-      </p:sp>
-      <p:sp>
-        <p:nvSpPr>
-          <p:cNvPr id="29" name="Rectangle 28"/>
+              <a:t>MySQL 은 약 20초 준비(그 전엔 ERROR 2002) · Connect 는 15초쯤(그 사이 HTTP 404) — 잠시 뒤 다시</a:t>
+            </a:r>
+          </a:p>
+        </p:txBody>
+      </p:sp>
+      <p:sp>
+        <p:nvSpPr>
+          <p:cNvPr id="33" name="Rectangle 32"/>
           <p:cNvSpPr/>
           <p:nvPr/>
         </p:nvSpPr>
@@ -8792,7 +9998,7 @@
       </p:sp>
       <p:sp>
         <p:nvSpPr>
-          <p:cNvPr id="30" name="TextBox 29"/>
+          <p:cNvPr id="34" name="TextBox 33"/>
           <p:cNvSpPr txBox="1"/>
           <p:nvPr/>
         </p:nvSpPr>
@@ -8833,7 +10039,7 @@
       </p:sp>
       <p:sp>
         <p:nvSpPr>
-          <p:cNvPr id="31" name="TextBox 30"/>
+          <p:cNvPr id="35" name="TextBox 34"/>
           <p:cNvSpPr txBox="1"/>
           <p:nvPr/>
         </p:nvSpPr>
@@ -8892,7 +10098,7 @@
       <p:grpSpPr/>
       <p:sp>
         <p:nvSpPr>
-          <p:cNvPr id="2" name="Oval 1"/>
+          <p:cNvPr id="2" name="deckgen:decor"/>
           <p:cNvSpPr/>
           <p:nvPr/>
         </p:nvSpPr>
@@ -8922,7 +10128,7 @@
       </p:sp>
       <p:sp>
         <p:nvSpPr>
-          <p:cNvPr id="3" name="Oval 2"/>
+          <p:cNvPr id="3" name="deckgen:decor"/>
           <p:cNvSpPr/>
           <p:nvPr/>
         </p:nvSpPr>
@@ -8952,7 +10158,7 @@
       </p:sp>
       <p:sp>
         <p:nvSpPr>
-          <p:cNvPr id="4" name="Oval 3"/>
+          <p:cNvPr id="4" name="deckgen:decor"/>
           <p:cNvSpPr/>
           <p:nvPr/>
         </p:nvSpPr>
@@ -9919,7 +11125,7 @@
       <p:grpSpPr/>
       <p:sp>
         <p:nvSpPr>
-          <p:cNvPr id="2" name="Oval 1"/>
+          <p:cNvPr id="2" name="deckgen:decor"/>
           <p:cNvSpPr/>
           <p:nvPr/>
         </p:nvSpPr>
@@ -9949,7 +11155,7 @@
       </p:sp>
       <p:sp>
         <p:nvSpPr>
-          <p:cNvPr id="3" name="Oval 2"/>
+          <p:cNvPr id="3" name="deckgen:decor"/>
           <p:cNvSpPr/>
           <p:nvPr/>
         </p:nvSpPr>
@@ -9979,7 +11185,7 @@
       </p:sp>
       <p:sp>
         <p:nvSpPr>
-          <p:cNvPr id="4" name="Oval 3"/>
+          <p:cNvPr id="4" name="deckgen:decor"/>
           <p:cNvSpPr/>
           <p:nvPr/>
         </p:nvSpPr>
@@ -10084,7 +11290,7 @@
                 <a:ea typeface="Pretendard"/>
                 <a:cs typeface="Pretendard"/>
               </a:rPr>
-              <a:t>register-mysql.json — 여섯 설정과 REST 등록</a:t>
+              <a:t>register-mysql.json — 일곱 설정과 REST 등록</a:t>
             </a:r>
           </a:p>
         </p:txBody>
@@ -10341,11 +11547,11 @@
         <p:spPr>
           <a:xfrm>
             <a:off x="1143000" y="3448050"/>
-            <a:ext cx="5402580" cy="619125"/>
+            <a:ext cx="5402580" cy="519793"/>
           </a:xfrm>
           <a:prstGeom prst="roundRect">
             <a:avLst>
-              <a:gd name="adj" fmla="val 6153"/>
+              <a:gd name="adj" fmla="val 7329"/>
             </a:avLst>
           </a:prstGeom>
           <a:solidFill>
@@ -10375,7 +11581,7 @@
         <p:spPr>
           <a:xfrm>
             <a:off x="1238250" y="3448050"/>
-            <a:ext cx="5212080" cy="619125"/>
+            <a:ext cx="5212080" cy="519793"/>
           </a:xfrm>
           <a:prstGeom prst="rect">
             <a:avLst/>
@@ -10416,11 +11622,11 @@
         <p:spPr>
           <a:xfrm>
             <a:off x="6583680" y="3448050"/>
-            <a:ext cx="4762500" cy="619125"/>
+            <a:ext cx="4762500" cy="519793"/>
           </a:xfrm>
           <a:prstGeom prst="roundRect">
             <a:avLst>
-              <a:gd name="adj" fmla="val 6153"/>
+              <a:gd name="adj" fmla="val 7329"/>
             </a:avLst>
           </a:prstGeom>
           <a:solidFill>
@@ -10450,7 +11656,7 @@
         <p:spPr>
           <a:xfrm>
             <a:off x="6678930" y="3448050"/>
-            <a:ext cx="4572000" cy="619125"/>
+            <a:ext cx="4572000" cy="519793"/>
           </a:xfrm>
           <a:prstGeom prst="rect">
             <a:avLst/>
@@ -10491,11 +11697,11 @@
         <p:spPr>
           <a:xfrm>
             <a:off x="11384280" y="3448050"/>
-            <a:ext cx="5760720" cy="619125"/>
+            <a:ext cx="5760720" cy="519793"/>
           </a:xfrm>
           <a:prstGeom prst="roundRect">
             <a:avLst>
-              <a:gd name="adj" fmla="val 6153"/>
+              <a:gd name="adj" fmla="val 7329"/>
             </a:avLst>
           </a:prstGeom>
           <a:solidFill>
@@ -10525,7 +11731,7 @@
         <p:spPr>
           <a:xfrm>
             <a:off x="11479530" y="3448050"/>
-            <a:ext cx="5570220" cy="619125"/>
+            <a:ext cx="5570220" cy="519793"/>
           </a:xfrm>
           <a:prstGeom prst="rect">
             <a:avLst/>
@@ -10565,12 +11771,12 @@
         </p:nvSpPr>
         <p:spPr>
           <a:xfrm>
-            <a:off x="1143000" y="4143375"/>
-            <a:ext cx="5402580" cy="619125"/>
+            <a:off x="1143000" y="4044043"/>
+            <a:ext cx="5402580" cy="519793"/>
           </a:xfrm>
           <a:prstGeom prst="roundRect">
             <a:avLst>
-              <a:gd name="adj" fmla="val 6153"/>
+              <a:gd name="adj" fmla="val 7329"/>
             </a:avLst>
           </a:prstGeom>
           <a:solidFill>
@@ -10599,8 +11805,8 @@
         </p:nvSpPr>
         <p:spPr>
           <a:xfrm>
-            <a:off x="1238250" y="4143375"/>
-            <a:ext cx="5212080" cy="619125"/>
+            <a:off x="1238250" y="4044043"/>
+            <a:ext cx="5212080" cy="519793"/>
           </a:xfrm>
           <a:prstGeom prst="rect">
             <a:avLst/>
@@ -10640,12 +11846,12 @@
         </p:nvSpPr>
         <p:spPr>
           <a:xfrm>
-            <a:off x="6583680" y="4143375"/>
-            <a:ext cx="4762500" cy="619125"/>
+            <a:off x="6583680" y="4044043"/>
+            <a:ext cx="4762500" cy="519793"/>
           </a:xfrm>
           <a:prstGeom prst="roundRect">
             <a:avLst>
-              <a:gd name="adj" fmla="val 6153"/>
+              <a:gd name="adj" fmla="val 7329"/>
             </a:avLst>
           </a:prstGeom>
           <a:solidFill>
@@ -10674,8 +11880,8 @@
         </p:nvSpPr>
         <p:spPr>
           <a:xfrm>
-            <a:off x="6678930" y="4143375"/>
-            <a:ext cx="4572000" cy="619125"/>
+            <a:off x="6678930" y="4044043"/>
+            <a:ext cx="4572000" cy="519793"/>
           </a:xfrm>
           <a:prstGeom prst="rect">
             <a:avLst/>
@@ -10715,12 +11921,12 @@
         </p:nvSpPr>
         <p:spPr>
           <a:xfrm>
-            <a:off x="11384280" y="4143375"/>
-            <a:ext cx="5760720" cy="619125"/>
+            <a:off x="11384280" y="4044043"/>
+            <a:ext cx="5760720" cy="519793"/>
           </a:xfrm>
           <a:prstGeom prst="roundRect">
             <a:avLst>
-              <a:gd name="adj" fmla="val 6153"/>
+              <a:gd name="adj" fmla="val 7329"/>
             </a:avLst>
           </a:prstGeom>
           <a:solidFill>
@@ -10749,8 +11955,8 @@
         </p:nvSpPr>
         <p:spPr>
           <a:xfrm>
-            <a:off x="11479530" y="4143375"/>
-            <a:ext cx="5570220" cy="619125"/>
+            <a:off x="11479530" y="4044043"/>
+            <a:ext cx="5570220" cy="519793"/>
           </a:xfrm>
           <a:prstGeom prst="rect">
             <a:avLst/>
@@ -10790,12 +11996,12 @@
         </p:nvSpPr>
         <p:spPr>
           <a:xfrm>
-            <a:off x="1143000" y="4838700"/>
-            <a:ext cx="5402580" cy="619125"/>
+            <a:off x="1143000" y="4640036"/>
+            <a:ext cx="5402580" cy="519793"/>
           </a:xfrm>
           <a:prstGeom prst="roundRect">
             <a:avLst>
-              <a:gd name="adj" fmla="val 6153"/>
+              <a:gd name="adj" fmla="val 7329"/>
             </a:avLst>
           </a:prstGeom>
           <a:solidFill>
@@ -10824,8 +12030,8 @@
         </p:nvSpPr>
         <p:spPr>
           <a:xfrm>
-            <a:off x="1238250" y="4838700"/>
-            <a:ext cx="5212080" cy="619125"/>
+            <a:off x="1238250" y="4640036"/>
+            <a:ext cx="5212080" cy="519793"/>
           </a:xfrm>
           <a:prstGeom prst="rect">
             <a:avLst/>
@@ -10865,12 +12071,12 @@
         </p:nvSpPr>
         <p:spPr>
           <a:xfrm>
-            <a:off x="6583680" y="4838700"/>
-            <a:ext cx="4762500" cy="619125"/>
+            <a:off x="6583680" y="4640036"/>
+            <a:ext cx="4762500" cy="519793"/>
           </a:xfrm>
           <a:prstGeom prst="roundRect">
             <a:avLst>
-              <a:gd name="adj" fmla="val 6153"/>
+              <a:gd name="adj" fmla="val 7329"/>
             </a:avLst>
           </a:prstGeom>
           <a:solidFill>
@@ -10899,8 +12105,8 @@
         </p:nvSpPr>
         <p:spPr>
           <a:xfrm>
-            <a:off x="6678930" y="4838700"/>
-            <a:ext cx="4572000" cy="619125"/>
+            <a:off x="6678930" y="4640036"/>
+            <a:ext cx="4572000" cy="519793"/>
           </a:xfrm>
           <a:prstGeom prst="rect">
             <a:avLst/>
@@ -10940,12 +12146,12 @@
         </p:nvSpPr>
         <p:spPr>
           <a:xfrm>
-            <a:off x="11384280" y="4838700"/>
-            <a:ext cx="5760720" cy="619125"/>
+            <a:off x="11384280" y="4640036"/>
+            <a:ext cx="5760720" cy="519793"/>
           </a:xfrm>
           <a:prstGeom prst="roundRect">
             <a:avLst>
-              <a:gd name="adj" fmla="val 6153"/>
+              <a:gd name="adj" fmla="val 7329"/>
             </a:avLst>
           </a:prstGeom>
           <a:solidFill>
@@ -10974,8 +12180,8 @@
         </p:nvSpPr>
         <p:spPr>
           <a:xfrm>
-            <a:off x="11479530" y="4838700"/>
-            <a:ext cx="5570220" cy="619125"/>
+            <a:off x="11479530" y="4640036"/>
+            <a:ext cx="5570220" cy="519793"/>
           </a:xfrm>
           <a:prstGeom prst="rect">
             <a:avLst/>
@@ -11015,12 +12221,12 @@
         </p:nvSpPr>
         <p:spPr>
           <a:xfrm>
-            <a:off x="1143000" y="5534025"/>
-            <a:ext cx="5402580" cy="619125"/>
+            <a:off x="1143000" y="5236029"/>
+            <a:ext cx="5402580" cy="519793"/>
           </a:xfrm>
           <a:prstGeom prst="roundRect">
             <a:avLst>
-              <a:gd name="adj" fmla="val 6153"/>
+              <a:gd name="adj" fmla="val 7329"/>
             </a:avLst>
           </a:prstGeom>
           <a:solidFill>
@@ -11049,8 +12255,8 @@
         </p:nvSpPr>
         <p:spPr>
           <a:xfrm>
-            <a:off x="1238250" y="5534025"/>
-            <a:ext cx="5212080" cy="619125"/>
+            <a:off x="1238250" y="5236029"/>
+            <a:ext cx="5212080" cy="519793"/>
           </a:xfrm>
           <a:prstGeom prst="rect">
             <a:avLst/>
@@ -11090,12 +12296,12 @@
         </p:nvSpPr>
         <p:spPr>
           <a:xfrm>
-            <a:off x="6583680" y="5534025"/>
-            <a:ext cx="4762500" cy="619125"/>
+            <a:off x="6583680" y="5236029"/>
+            <a:ext cx="4762500" cy="519793"/>
           </a:xfrm>
           <a:prstGeom prst="roundRect">
             <a:avLst>
-              <a:gd name="adj" fmla="val 6153"/>
+              <a:gd name="adj" fmla="val 7329"/>
             </a:avLst>
           </a:prstGeom>
           <a:solidFill>
@@ -11124,8 +12330,8 @@
         </p:nvSpPr>
         <p:spPr>
           <a:xfrm>
-            <a:off x="6678930" y="5534025"/>
-            <a:ext cx="4572000" cy="619125"/>
+            <a:off x="6678930" y="5236029"/>
+            <a:ext cx="4572000" cy="519793"/>
           </a:xfrm>
           <a:prstGeom prst="rect">
             <a:avLst/>
@@ -11165,12 +12371,12 @@
         </p:nvSpPr>
         <p:spPr>
           <a:xfrm>
-            <a:off x="11384280" y="5534025"/>
-            <a:ext cx="5760720" cy="619125"/>
+            <a:off x="11384280" y="5236029"/>
+            <a:ext cx="5760720" cy="519793"/>
           </a:xfrm>
           <a:prstGeom prst="roundRect">
             <a:avLst>
-              <a:gd name="adj" fmla="val 6153"/>
+              <a:gd name="adj" fmla="val 7329"/>
             </a:avLst>
           </a:prstGeom>
           <a:solidFill>
@@ -11199,8 +12405,8 @@
         </p:nvSpPr>
         <p:spPr>
           <a:xfrm>
-            <a:off x="11479530" y="5534025"/>
-            <a:ext cx="5570220" cy="619125"/>
+            <a:off x="11479530" y="5236029"/>
+            <a:ext cx="5570220" cy="519793"/>
           </a:xfrm>
           <a:prstGeom prst="rect">
             <a:avLst/>
@@ -11240,12 +12446,12 @@
         </p:nvSpPr>
         <p:spPr>
           <a:xfrm>
-            <a:off x="1143000" y="6229350"/>
-            <a:ext cx="5402580" cy="619125"/>
+            <a:off x="1143000" y="5832021"/>
+            <a:ext cx="5402580" cy="519793"/>
           </a:xfrm>
           <a:prstGeom prst="roundRect">
             <a:avLst>
-              <a:gd name="adj" fmla="val 6153"/>
+              <a:gd name="adj" fmla="val 7329"/>
             </a:avLst>
           </a:prstGeom>
           <a:solidFill>
@@ -11274,8 +12480,8 @@
         </p:nvSpPr>
         <p:spPr>
           <a:xfrm>
-            <a:off x="1238250" y="6229350"/>
-            <a:ext cx="5212080" cy="619125"/>
+            <a:off x="1238250" y="5832021"/>
+            <a:ext cx="5212080" cy="519793"/>
           </a:xfrm>
           <a:prstGeom prst="rect">
             <a:avLst/>
@@ -11315,12 +12521,12 @@
         </p:nvSpPr>
         <p:spPr>
           <a:xfrm>
-            <a:off x="6583680" y="6229350"/>
-            <a:ext cx="4762500" cy="619125"/>
+            <a:off x="6583680" y="5832021"/>
+            <a:ext cx="4762500" cy="519793"/>
           </a:xfrm>
           <a:prstGeom prst="roundRect">
             <a:avLst>
-              <a:gd name="adj" fmla="val 6153"/>
+              <a:gd name="adj" fmla="val 7329"/>
             </a:avLst>
           </a:prstGeom>
           <a:solidFill>
@@ -11349,8 +12555,8 @@
         </p:nvSpPr>
         <p:spPr>
           <a:xfrm>
-            <a:off x="6678930" y="6229350"/>
-            <a:ext cx="4572000" cy="619125"/>
+            <a:off x="6678930" y="5832021"/>
+            <a:ext cx="4572000" cy="519793"/>
           </a:xfrm>
           <a:prstGeom prst="rect">
             <a:avLst/>
@@ -11390,12 +12596,12 @@
         </p:nvSpPr>
         <p:spPr>
           <a:xfrm>
-            <a:off x="11384280" y="6229350"/>
-            <a:ext cx="5760720" cy="619125"/>
+            <a:off x="11384280" y="5832021"/>
+            <a:ext cx="5760720" cy="519793"/>
           </a:xfrm>
           <a:prstGeom prst="roundRect">
             <a:avLst>
-              <a:gd name="adj" fmla="val 6153"/>
+              <a:gd name="adj" fmla="val 7329"/>
             </a:avLst>
           </a:prstGeom>
           <a:solidFill>
@@ -11424,8 +12630,8 @@
         </p:nvSpPr>
         <p:spPr>
           <a:xfrm>
-            <a:off x="11479530" y="6229350"/>
-            <a:ext cx="5570220" cy="619125"/>
+            <a:off x="11479530" y="5832021"/>
+            <a:ext cx="5570220" cy="519793"/>
           </a:xfrm>
           <a:prstGeom prst="rect">
             <a:avLst/>
@@ -11465,12 +12671,12 @@
         </p:nvSpPr>
         <p:spPr>
           <a:xfrm>
-            <a:off x="1143000" y="6924675"/>
-            <a:ext cx="5402580" cy="619125"/>
+            <a:off x="1143000" y="6428014"/>
+            <a:ext cx="5402580" cy="519793"/>
           </a:xfrm>
           <a:prstGeom prst="roundRect">
             <a:avLst>
-              <a:gd name="adj" fmla="val 6153"/>
+              <a:gd name="adj" fmla="val 7329"/>
             </a:avLst>
           </a:prstGeom>
           <a:solidFill>
@@ -11499,8 +12705,8 @@
         </p:nvSpPr>
         <p:spPr>
           <a:xfrm>
-            <a:off x="1238250" y="6924675"/>
-            <a:ext cx="5212080" cy="619125"/>
+            <a:off x="1238250" y="6428014"/>
+            <a:ext cx="5212080" cy="519793"/>
           </a:xfrm>
           <a:prstGeom prst="rect">
             <a:avLst/>
@@ -11527,7 +12733,7 @@
                 <a:ea typeface="Pretendard"/>
                 <a:cs typeface="Pretendard"/>
               </a:rPr>
-              <a:t>schema.history…servers</a:t>
+              <a:t>decimal.handling.mode</a:t>
             </a:r>
           </a:p>
         </p:txBody>
@@ -11540,12 +12746,12 @@
         </p:nvSpPr>
         <p:spPr>
           <a:xfrm>
-            <a:off x="6583680" y="6924675"/>
-            <a:ext cx="4762500" cy="619125"/>
+            <a:off x="6583680" y="6428014"/>
+            <a:ext cx="4762500" cy="519793"/>
           </a:xfrm>
           <a:prstGeom prst="roundRect">
             <a:avLst>
-              <a:gd name="adj" fmla="val 6153"/>
+              <a:gd name="adj" fmla="val 7329"/>
             </a:avLst>
           </a:prstGeom>
           <a:solidFill>
@@ -11574,8 +12780,8 @@
         </p:nvSpPr>
         <p:spPr>
           <a:xfrm>
-            <a:off x="6678930" y="6924675"/>
-            <a:ext cx="4572000" cy="619125"/>
+            <a:off x="6678930" y="6428014"/>
+            <a:ext cx="4572000" cy="519793"/>
           </a:xfrm>
           <a:prstGeom prst="rect">
             <a:avLst/>
@@ -11602,7 +12808,7 @@
                 <a:ea typeface="Pretendard"/>
                 <a:cs typeface="Pretendard"/>
               </a:rPr>
-              <a:t>kafka:29092</a:t>
+              <a:t>string</a:t>
             </a:r>
           </a:p>
         </p:txBody>
@@ -11615,12 +12821,12 @@
         </p:nvSpPr>
         <p:spPr>
           <a:xfrm>
-            <a:off x="11384280" y="6924675"/>
-            <a:ext cx="5760720" cy="619125"/>
+            <a:off x="11384280" y="6428014"/>
+            <a:ext cx="5760720" cy="519793"/>
           </a:xfrm>
           <a:prstGeom prst="roundRect">
             <a:avLst>
-              <a:gd name="adj" fmla="val 6153"/>
+              <a:gd name="adj" fmla="val 7329"/>
             </a:avLst>
           </a:prstGeom>
           <a:solidFill>
@@ -11649,8 +12855,8 @@
         </p:nvSpPr>
         <p:spPr>
           <a:xfrm>
-            <a:off x="11479530" y="6924675"/>
-            <a:ext cx="5570220" cy="619125"/>
+            <a:off x="11479530" y="6428014"/>
+            <a:ext cx="5570220" cy="519793"/>
           </a:xfrm>
           <a:prstGeom prst="rect">
             <a:avLst/>
@@ -11677,6 +12883,231 @@
                 <a:ea typeface="Pretendard"/>
                 <a:cs typeface="Pretendard"/>
               </a:rPr>
+              <a:t>금액을 "12000.00" 으로</a:t>
+            </a:r>
+          </a:p>
+        </p:txBody>
+      </p:sp>
+      <p:sp>
+        <p:nvSpPr>
+          <p:cNvPr id="50" name="Rounded Rectangle 49"/>
+          <p:cNvSpPr/>
+          <p:nvPr/>
+        </p:nvSpPr>
+        <p:spPr>
+          <a:xfrm>
+            <a:off x="1143000" y="7024007"/>
+            <a:ext cx="5402580" cy="519793"/>
+          </a:xfrm>
+          <a:prstGeom prst="roundRect">
+            <a:avLst>
+              <a:gd name="adj" fmla="val 7329"/>
+            </a:avLst>
+          </a:prstGeom>
+          <a:solidFill>
+            <a:srgbClr val="EDF3FD"/>
+          </a:solidFill>
+          <a:ln w="9525">
+            <a:solidFill>
+              <a:srgbClr val="BFD3F5"/>
+            </a:solidFill>
+          </a:ln>
+          <a:effectLst/>
+        </p:spPr>
+        <p:txBody>
+          <a:bodyPr rtlCol="0" anchor="ctr" wrap="square"/>
+          <a:lstStyle/>
+          <a:p>
+            <a:pPr algn="ctr"/>
+          </a:p>
+        </p:txBody>
+      </p:sp>
+      <p:sp>
+        <p:nvSpPr>
+          <p:cNvPr id="51" name="TextBox 50"/>
+          <p:cNvSpPr txBox="1"/>
+          <p:nvPr/>
+        </p:nvSpPr>
+        <p:spPr>
+          <a:xfrm>
+            <a:off x="1238250" y="7024007"/>
+            <a:ext cx="5212080" cy="519793"/>
+          </a:xfrm>
+          <a:prstGeom prst="rect">
+            <a:avLst/>
+          </a:prstGeom>
+          <a:noFill/>
+        </p:spPr>
+        <p:txBody>
+          <a:bodyPr wrap="square" lIns="0" rIns="0" tIns="0" bIns="0" anchor="ctr">
+            <a:spAutoFit/>
+          </a:bodyPr>
+          <a:lstStyle/>
+          <a:p>
+            <a:pPr algn="l">
+              <a:lnSpc>
+                <a:spcPct val="115000"/>
+              </a:lnSpc>
+            </a:pPr>
+            <a:r>
+              <a:rPr sz="1875" b="1">
+                <a:solidFill>
+                  <a:srgbClr val="0D2B5E"/>
+                </a:solidFill>
+                <a:latin typeface="Pretendard"/>
+                <a:ea typeface="Pretendard"/>
+                <a:cs typeface="Pretendard"/>
+              </a:rPr>
+              <a:t>schema.history…servers</a:t>
+            </a:r>
+          </a:p>
+        </p:txBody>
+      </p:sp>
+      <p:sp>
+        <p:nvSpPr>
+          <p:cNvPr id="52" name="Rounded Rectangle 51"/>
+          <p:cNvSpPr/>
+          <p:nvPr/>
+        </p:nvSpPr>
+        <p:spPr>
+          <a:xfrm>
+            <a:off x="6583680" y="7024007"/>
+            <a:ext cx="4762500" cy="519793"/>
+          </a:xfrm>
+          <a:prstGeom prst="roundRect">
+            <a:avLst>
+              <a:gd name="adj" fmla="val 7329"/>
+            </a:avLst>
+          </a:prstGeom>
+          <a:solidFill>
+            <a:srgbClr val="FAFBFD"/>
+          </a:solidFill>
+          <a:ln w="9525">
+            <a:solidFill>
+              <a:srgbClr val="DCE1E8"/>
+            </a:solidFill>
+          </a:ln>
+          <a:effectLst/>
+        </p:spPr>
+        <p:txBody>
+          <a:bodyPr rtlCol="0" anchor="ctr" wrap="square"/>
+          <a:lstStyle/>
+          <a:p>
+            <a:pPr algn="ctr"/>
+          </a:p>
+        </p:txBody>
+      </p:sp>
+      <p:sp>
+        <p:nvSpPr>
+          <p:cNvPr id="53" name="TextBox 52"/>
+          <p:cNvSpPr txBox="1"/>
+          <p:nvPr/>
+        </p:nvSpPr>
+        <p:spPr>
+          <a:xfrm>
+            <a:off x="6678930" y="7024007"/>
+            <a:ext cx="4572000" cy="519793"/>
+          </a:xfrm>
+          <a:prstGeom prst="rect">
+            <a:avLst/>
+          </a:prstGeom>
+          <a:noFill/>
+        </p:spPr>
+        <p:txBody>
+          <a:bodyPr wrap="square" lIns="0" rIns="0" tIns="0" bIns="0" anchor="ctr">
+            <a:spAutoFit/>
+          </a:bodyPr>
+          <a:lstStyle/>
+          <a:p>
+            <a:pPr algn="ctr">
+              <a:lnSpc>
+                <a:spcPct val="115000"/>
+              </a:lnSpc>
+            </a:pPr>
+            <a:r>
+              <a:rPr sz="1875" b="0">
+                <a:solidFill>
+                  <a:srgbClr val="3D3D3D"/>
+                </a:solidFill>
+                <a:latin typeface="Pretendard"/>
+                <a:ea typeface="Pretendard"/>
+                <a:cs typeface="Pretendard"/>
+              </a:rPr>
+              <a:t>kafka:29092</a:t>
+            </a:r>
+          </a:p>
+        </p:txBody>
+      </p:sp>
+      <p:sp>
+        <p:nvSpPr>
+          <p:cNvPr id="54" name="Rounded Rectangle 53"/>
+          <p:cNvSpPr/>
+          <p:nvPr/>
+        </p:nvSpPr>
+        <p:spPr>
+          <a:xfrm>
+            <a:off x="11384280" y="7024007"/>
+            <a:ext cx="5760720" cy="519793"/>
+          </a:xfrm>
+          <a:prstGeom prst="roundRect">
+            <a:avLst>
+              <a:gd name="adj" fmla="val 7329"/>
+            </a:avLst>
+          </a:prstGeom>
+          <a:solidFill>
+            <a:srgbClr val="FAFBFD"/>
+          </a:solidFill>
+          <a:ln w="9525">
+            <a:solidFill>
+              <a:srgbClr val="DCE1E8"/>
+            </a:solidFill>
+          </a:ln>
+          <a:effectLst/>
+        </p:spPr>
+        <p:txBody>
+          <a:bodyPr rtlCol="0" anchor="ctr" wrap="square"/>
+          <a:lstStyle/>
+          <a:p>
+            <a:pPr algn="ctr"/>
+          </a:p>
+        </p:txBody>
+      </p:sp>
+      <p:sp>
+        <p:nvSpPr>
+          <p:cNvPr id="55" name="TextBox 54"/>
+          <p:cNvSpPr txBox="1"/>
+          <p:nvPr/>
+        </p:nvSpPr>
+        <p:spPr>
+          <a:xfrm>
+            <a:off x="11479530" y="7024007"/>
+            <a:ext cx="5570220" cy="519793"/>
+          </a:xfrm>
+          <a:prstGeom prst="rect">
+            <a:avLst/>
+          </a:prstGeom>
+          <a:noFill/>
+        </p:spPr>
+        <p:txBody>
+          <a:bodyPr wrap="square" lIns="0" rIns="0" tIns="0" bIns="0" anchor="ctr">
+            <a:spAutoFit/>
+          </a:bodyPr>
+          <a:lstStyle/>
+          <a:p>
+            <a:pPr algn="ctr">
+              <a:lnSpc>
+                <a:spcPct val="115000"/>
+              </a:lnSpc>
+            </a:pPr>
+            <a:r>
+              <a:rPr sz="1875" b="0">
+                <a:solidFill>
+                  <a:srgbClr val="3D3D3D"/>
+                </a:solidFill>
+                <a:latin typeface="Pretendard"/>
+                <a:ea typeface="Pretendard"/>
+                <a:cs typeface="Pretendard"/>
+              </a:rPr>
               <a:t>내부 리스너(6-2)</a:t>
             </a:r>
           </a:p>
@@ -11684,7 +13115,7 @@
       </p:sp>
       <p:sp>
         <p:nvSpPr>
-          <p:cNvPr id="50" name="TextBox 49"/>
+          <p:cNvPr id="56" name="TextBox 55"/>
           <p:cNvSpPr txBox="1"/>
           <p:nvPr/>
         </p:nvSpPr>
@@ -11718,14 +13149,14 @@
                 <a:ea typeface="Pretendard"/>
                 <a:cs typeface="Pretendard"/>
               </a:rPr>
-              <a:t>POST --data @register-mysql.json …/connectors 뒤 status 에서 connector·tasks[0] 모두 RUNNING 이면 성공</a:t>
-            </a:r>
-          </a:p>
-        </p:txBody>
-      </p:sp>
-      <p:sp>
-        <p:nvSpPr>
-          <p:cNvPr id="51" name="Rectangle 50"/>
+              <a:t>POST 뒤 status 에서 connector · tasks[0] 모두 RUNNING — 토픽 셋: shop · shop.shop.orders · schema-changes.shop</a:t>
+            </a:r>
+          </a:p>
+        </p:txBody>
+      </p:sp>
+      <p:sp>
+        <p:nvSpPr>
+          <p:cNvPr id="57" name="Rectangle 56"/>
           <p:cNvSpPr/>
           <p:nvPr/>
         </p:nvSpPr>
@@ -11755,7 +13186,7 @@
       </p:sp>
       <p:sp>
         <p:nvSpPr>
-          <p:cNvPr id="52" name="TextBox 51"/>
+          <p:cNvPr id="58" name="TextBox 57"/>
           <p:cNvSpPr txBox="1"/>
           <p:nvPr/>
         </p:nvSpPr>
@@ -11796,7 +13227,7 @@
       </p:sp>
       <p:sp>
         <p:nvSpPr>
-          <p:cNvPr id="53" name="TextBox 52"/>
+          <p:cNvPr id="59" name="TextBox 58"/>
           <p:cNvSpPr txBox="1"/>
           <p:nvPr/>
         </p:nvSpPr>
@@ -11855,7 +13286,7 @@
       <p:grpSpPr/>
       <p:sp>
         <p:nvSpPr>
-          <p:cNvPr id="2" name="Oval 1"/>
+          <p:cNvPr id="2" name="deckgen:decor"/>
           <p:cNvSpPr/>
           <p:nvPr/>
         </p:nvSpPr>
@@ -11885,7 +13316,7 @@
       </p:sp>
       <p:sp>
         <p:nvSpPr>
-          <p:cNvPr id="3" name="Oval 2"/>
+          <p:cNvPr id="3" name="deckgen:decor"/>
           <p:cNvSpPr/>
           <p:nvPr/>
         </p:nvSpPr>
@@ -11915,7 +13346,7 @@
       </p:sp>
       <p:sp>
         <p:nvSpPr>
-          <p:cNvPr id="4" name="Oval 3"/>
+          <p:cNvPr id="4" name="deckgen:decor"/>
           <p:cNvSpPr/>
           <p:nvPr/>
         </p:nvSpPr>
@@ -11979,7 +13410,7 @@
                 <a:ea typeface="Pretendard"/>
                 <a:cs typeface="Pretendard"/>
               </a:rPr>
-              <a:t>3단계 곁가지 — 일부러 실패시키기</a:t>
+              <a:t>3단계 — 일부러 빼 보기</a:t>
             </a:r>
           </a:p>
         </p:txBody>
@@ -12020,7 +13451,7 @@
                 <a:ea typeface="Pretendard"/>
                 <a:cs typeface="Pretendard"/>
               </a:rPr>
-              <a:t>hostname 을 localhost 로 — FAILED 를 읽는다</a:t>
+              <a:t>decimal.handling.mode 를 빼면 금액이 깨진다</a:t>
             </a:r>
           </a:p>
         </p:txBody>
@@ -12063,8 +13494,8 @@
         </p:nvSpPr>
         <p:spPr>
           <a:xfrm>
-            <a:off x="1143000" y="3067050"/>
-            <a:ext cx="16002000" cy="438150"/>
+            <a:off x="1143000" y="2857500"/>
+            <a:ext cx="7372350" cy="533400"/>
           </a:xfrm>
           <a:prstGeom prst="rect">
             <a:avLst/>
@@ -12079,11 +13510,52 @@
           <a:p>
             <a:pPr algn="l">
               <a:lnSpc>
-                <a:spcPct val="130000"/>
-              </a:lnSpc>
-            </a:pPr>
-            <a:r>
-              <a:rPr sz="2550" b="1">
+                <a:spcPct val="110000"/>
+              </a:lnSpc>
+            </a:pPr>
+            <a:r>
+              <a:rPr sz="3150" b="1">
+                <a:solidFill>
+                  <a:srgbClr val="0D2B5E"/>
+                </a:solidFill>
+                <a:latin typeface="Pretendard"/>
+                <a:ea typeface="Pretendard"/>
+                <a:cs typeface="Pretendard"/>
+              </a:rPr>
+              <a:t>빼면</a:t>
+            </a:r>
+          </a:p>
+        </p:txBody>
+      </p:sp>
+      <p:sp>
+        <p:nvSpPr>
+          <p:cNvPr id="9" name="TextBox 8"/>
+          <p:cNvSpPr txBox="1"/>
+          <p:nvPr/>
+        </p:nvSpPr>
+        <p:spPr>
+          <a:xfrm>
+            <a:off x="1143000" y="3467100"/>
+            <a:ext cx="7372350" cy="876300"/>
+          </a:xfrm>
+          <a:prstGeom prst="rect">
+            <a:avLst/>
+          </a:prstGeom>
+          <a:noFill/>
+        </p:spPr>
+        <p:txBody>
+          <a:bodyPr wrap="square" lIns="0" rIns="0" tIns="0" bIns="0" anchor="t">
+            <a:spAutoFit/>
+          </a:bodyPr>
+          <a:lstStyle/>
+          <a:p>
+            <a:pPr algn="l">
+              <a:lnSpc>
+                <a:spcPct val="146000"/>
+              </a:lnSpc>
+            </a:pPr>
+            <a:r>
+              <a:rPr sz="2250" b="0">
                 <a:solidFill>
                   <a:srgbClr val="3D3D3D"/>
                 </a:solidFill>
@@ -12091,25 +13563,25 @@
                 <a:ea typeface="Pretendard"/>
                 <a:cs typeface="Pretendard"/>
               </a:rPr>
-              <a:t>정리·회고의 「자주 겪는 오류」 첫 번째를 직접 겪어 봅니다 — 커넥터를 삭제한 뒤 틀린 값으로 다시 등록</a:t>
-            </a:r>
-          </a:p>
-        </p:txBody>
-      </p:sp>
-      <p:sp>
-        <p:nvSpPr>
-          <p:cNvPr id="9" name="Rounded Rectangle 8"/>
-          <p:cNvSpPr/>
-          <p:nvPr/>
-        </p:nvSpPr>
-        <p:spPr>
-          <a:xfrm>
-            <a:off x="1143000" y="3924300"/>
-            <a:ext cx="2895600" cy="3143250"/>
+              <a:t>"amount": "Ek+A" — 알아볼 수 없는 글자</a:t>
+            </a:r>
+          </a:p>
+        </p:txBody>
+      </p:sp>
+      <p:sp>
+        <p:nvSpPr>
+          <p:cNvPr id="10" name="Rounded Rectangle 9"/>
+          <p:cNvSpPr/>
+          <p:nvPr/>
+        </p:nvSpPr>
+        <p:spPr>
+          <a:xfrm>
+            <a:off x="1143000" y="4610100"/>
+            <a:ext cx="7372350" cy="2857500"/>
           </a:xfrm>
           <a:prstGeom prst="roundRect">
             <a:avLst>
-              <a:gd name="adj" fmla="val 1644"/>
+              <a:gd name="adj" fmla="val 1666"/>
             </a:avLst>
           </a:prstGeom>
           <a:solidFill>
@@ -12132,20 +13604,20 @@
       </p:sp>
       <p:sp>
         <p:nvSpPr>
-          <p:cNvPr id="10" name="Rectangle 9"/>
-          <p:cNvSpPr/>
-          <p:nvPr/>
-        </p:nvSpPr>
-        <p:spPr>
-          <a:xfrm>
-            <a:off x="1143000" y="3924300"/>
-            <a:ext cx="2895600" cy="914400"/>
-          </a:xfrm>
-          <a:prstGeom prst="rect">
-            <a:avLst/>
-          </a:prstGeom>
-          <a:solidFill>
-            <a:srgbClr val="0D2B5E"/>
+          <p:cNvPr id="11" name="Oval 10"/>
+          <p:cNvSpPr/>
+          <p:nvPr/>
+        </p:nvSpPr>
+        <p:spPr>
+          <a:xfrm>
+            <a:off x="1447800" y="5016817"/>
+            <a:ext cx="97155" cy="97155"/>
+          </a:xfrm>
+          <a:prstGeom prst="ellipse">
+            <a:avLst/>
+          </a:prstGeom>
+          <a:solidFill>
+            <a:srgbClr val="1E5BC6"/>
           </a:solidFill>
           <a:ln>
             <a:noFill/>
@@ -12162,14 +13634,197 @@
       </p:sp>
       <p:sp>
         <p:nvSpPr>
-          <p:cNvPr id="11" name="TextBox 10"/>
-          <p:cNvSpPr txBox="1"/>
-          <p:nvPr/>
-        </p:nvSpPr>
-        <p:spPr>
-          <a:xfrm>
-            <a:off x="1143000" y="4171950"/>
-            <a:ext cx="2895600" cy="419100"/>
+          <p:cNvPr id="12" name="TextBox 11"/>
+          <p:cNvSpPr txBox="1"/>
+          <p:nvPr/>
+        </p:nvSpPr>
+        <p:spPr>
+          <a:xfrm>
+            <a:off x="1633538" y="4838700"/>
+            <a:ext cx="6634162" cy="453390"/>
+          </a:xfrm>
+          <a:prstGeom prst="rect">
+            <a:avLst/>
+          </a:prstGeom>
+          <a:noFill/>
+        </p:spPr>
+        <p:txBody>
+          <a:bodyPr wrap="square" lIns="0" rIns="0" tIns="0" bIns="0" anchor="ctr">
+            <a:spAutoFit/>
+          </a:bodyPr>
+          <a:lstStyle/>
+          <a:p>
+            <a:pPr algn="l">
+              <a:lnSpc>
+                <a:spcPct val="120000"/>
+              </a:lnSpc>
+            </a:pPr>
+            <a:r>
+              <a:rPr sz="1575" b="0">
+                <a:solidFill>
+                  <a:srgbClr val="3D3D3D"/>
+                </a:solidFill>
+                <a:latin typeface="Pretendard"/>
+                <a:ea typeface="Pretendard"/>
+                <a:cs typeface="Pretendard"/>
+              </a:rPr>
+              <a:t>정밀도를 지키려고 숫자를 바이트로 보낸다</a:t>
+            </a:r>
+          </a:p>
+        </p:txBody>
+      </p:sp>
+      <p:sp>
+        <p:nvSpPr>
+          <p:cNvPr id="13" name="Oval 12"/>
+          <p:cNvSpPr/>
+          <p:nvPr/>
+        </p:nvSpPr>
+        <p:spPr>
+          <a:xfrm>
+            <a:off x="1447800" y="5527358"/>
+            <a:ext cx="97155" cy="97155"/>
+          </a:xfrm>
+          <a:prstGeom prst="ellipse">
+            <a:avLst/>
+          </a:prstGeom>
+          <a:solidFill>
+            <a:srgbClr val="1E5BC6"/>
+          </a:solidFill>
+          <a:ln>
+            <a:noFill/>
+          </a:ln>
+          <a:effectLst/>
+        </p:spPr>
+        <p:txBody>
+          <a:bodyPr rtlCol="0" anchor="ctr" wrap="square"/>
+          <a:lstStyle/>
+          <a:p>
+            <a:pPr algn="ctr"/>
+          </a:p>
+        </p:txBody>
+      </p:sp>
+      <p:sp>
+        <p:nvSpPr>
+          <p:cNvPr id="14" name="TextBox 13"/>
+          <p:cNvSpPr txBox="1"/>
+          <p:nvPr/>
+        </p:nvSpPr>
+        <p:spPr>
+          <a:xfrm>
+            <a:off x="1633538" y="5349240"/>
+            <a:ext cx="6634162" cy="453390"/>
+          </a:xfrm>
+          <a:prstGeom prst="rect">
+            <a:avLst/>
+          </a:prstGeom>
+          <a:noFill/>
+        </p:spPr>
+        <p:txBody>
+          <a:bodyPr wrap="square" lIns="0" rIns="0" tIns="0" bIns="0" anchor="ctr">
+            <a:spAutoFit/>
+          </a:bodyPr>
+          <a:lstStyle/>
+          <a:p>
+            <a:pPr algn="l">
+              <a:lnSpc>
+                <a:spcPct val="120000"/>
+              </a:lnSpc>
+            </a:pPr>
+            <a:r>
+              <a:rPr sz="1575" b="0">
+                <a:solidFill>
+                  <a:srgbClr val="3D3D3D"/>
+                </a:solidFill>
+                <a:latin typeface="Pretendard"/>
+                <a:ea typeface="Pretendard"/>
+                <a:cs typeface="Pretendard"/>
+              </a:rPr>
+              <a:t>JSON 에는 그 바이트가 base64 로 찍힌다</a:t>
+            </a:r>
+          </a:p>
+        </p:txBody>
+      </p:sp>
+      <p:sp>
+        <p:nvSpPr>
+          <p:cNvPr id="15" name="Oval 14"/>
+          <p:cNvSpPr/>
+          <p:nvPr/>
+        </p:nvSpPr>
+        <p:spPr>
+          <a:xfrm>
+            <a:off x="1447800" y="6037898"/>
+            <a:ext cx="97155" cy="97155"/>
+          </a:xfrm>
+          <a:prstGeom prst="ellipse">
+            <a:avLst/>
+          </a:prstGeom>
+          <a:solidFill>
+            <a:srgbClr val="1E5BC6"/>
+          </a:solidFill>
+          <a:ln>
+            <a:noFill/>
+          </a:ln>
+          <a:effectLst/>
+        </p:spPr>
+        <p:txBody>
+          <a:bodyPr rtlCol="0" anchor="ctr" wrap="square"/>
+          <a:lstStyle/>
+          <a:p>
+            <a:pPr algn="ctr"/>
+          </a:p>
+        </p:txBody>
+      </p:sp>
+      <p:sp>
+        <p:nvSpPr>
+          <p:cNvPr id="16" name="TextBox 15"/>
+          <p:cNvSpPr txBox="1"/>
+          <p:nvPr/>
+        </p:nvSpPr>
+        <p:spPr>
+          <a:xfrm>
+            <a:off x="1633538" y="5859780"/>
+            <a:ext cx="6634162" cy="453390"/>
+          </a:xfrm>
+          <a:prstGeom prst="rect">
+            <a:avLst/>
+          </a:prstGeom>
+          <a:noFill/>
+        </p:spPr>
+        <p:txBody>
+          <a:bodyPr wrap="square" lIns="0" rIns="0" tIns="0" bIns="0" anchor="ctr">
+            <a:spAutoFit/>
+          </a:bodyPr>
+          <a:lstStyle/>
+          <a:p>
+            <a:pPr algn="l">
+              <a:lnSpc>
+                <a:spcPct val="120000"/>
+              </a:lnSpc>
+            </a:pPr>
+            <a:r>
+              <a:rPr sz="1575" b="0">
+                <a:solidFill>
+                  <a:srgbClr val="3D3D3D"/>
+                </a:solidFill>
+                <a:latin typeface="Pretendard"/>
+                <a:ea typeface="Pretendard"/>
+                <a:cs typeface="Pretendard"/>
+              </a:rPr>
+              <a:t>6-5 MinIO 파일에도 그대로 담긴다</a:t>
+            </a:r>
+          </a:p>
+        </p:txBody>
+      </p:sp>
+      <p:sp>
+        <p:nvSpPr>
+          <p:cNvPr id="17" name="TextBox 16"/>
+          <p:cNvSpPr txBox="1"/>
+          <p:nvPr/>
+        </p:nvSpPr>
+        <p:spPr>
+          <a:xfrm>
+            <a:off x="9772650" y="2857500"/>
+            <a:ext cx="7372350" cy="533400"/>
           </a:xfrm>
           <a:prstGeom prst="rect">
             <a:avLst/>
@@ -12182,35 +13837,35 @@
           </a:bodyPr>
           <a:lstStyle/>
           <a:p>
-            <a:pPr algn="ctr">
-              <a:lnSpc>
-                <a:spcPct val="100000"/>
-              </a:lnSpc>
-            </a:pPr>
-            <a:r>
-              <a:rPr sz="2475" b="1">
-                <a:solidFill>
-                  <a:srgbClr val="FFFFFF"/>
-                </a:solidFill>
-                <a:latin typeface="Pretendard"/>
-                <a:ea typeface="Pretendard"/>
-                <a:cs typeface="Pretendard"/>
-              </a:rPr>
-              <a:t>삭제</a:t>
-            </a:r>
-          </a:p>
-        </p:txBody>
-      </p:sp>
-      <p:sp>
-        <p:nvSpPr>
-          <p:cNvPr id="12" name="TextBox 11"/>
-          <p:cNvSpPr txBox="1"/>
-          <p:nvPr/>
-        </p:nvSpPr>
-        <p:spPr>
-          <a:xfrm>
-            <a:off x="1352550" y="5143500"/>
-            <a:ext cx="2476500" cy="1524000"/>
+            <a:pPr algn="l">
+              <a:lnSpc>
+                <a:spcPct val="110000"/>
+              </a:lnSpc>
+            </a:pPr>
+            <a:r>
+              <a:rPr sz="3150" b="1">
+                <a:solidFill>
+                  <a:srgbClr val="0D2B5E"/>
+                </a:solidFill>
+                <a:latin typeface="Pretendard"/>
+                <a:ea typeface="Pretendard"/>
+                <a:cs typeface="Pretendard"/>
+              </a:rPr>
+              <a:t>"string" 으로 두면</a:t>
+            </a:r>
+          </a:p>
+        </p:txBody>
+      </p:sp>
+      <p:sp>
+        <p:nvSpPr>
+          <p:cNvPr id="18" name="TextBox 17"/>
+          <p:cNvSpPr txBox="1"/>
+          <p:nvPr/>
+        </p:nvSpPr>
+        <p:spPr>
+          <a:xfrm>
+            <a:off x="9772650" y="3467100"/>
+            <a:ext cx="7372350" cy="876300"/>
           </a:xfrm>
           <a:prstGeom prst="rect">
             <a:avLst/>
@@ -12223,13 +13878,13 @@
           </a:bodyPr>
           <a:lstStyle/>
           <a:p>
-            <a:pPr algn="ctr">
+            <a:pPr algn="l">
               <a:lnSpc>
                 <a:spcPct val="146000"/>
               </a:lnSpc>
             </a:pPr>
             <a:r>
-              <a:rPr sz="2100" b="0">
+              <a:rPr sz="2250" b="0">
                 <a:solidFill>
                   <a:srgbClr val="3D3D3D"/>
                 </a:solidFill>
@@ -12237,43 +13892,25 @@
                 <a:ea typeface="Pretendard"/>
                 <a:cs typeface="Pretendard"/>
               </a:rPr>
-              <a:t>DELETE 로</a:t>
-            </a:r>
-          </a:p>
-          <a:p>
-            <a:pPr algn="ctr">
-              <a:lnSpc>
-                <a:spcPct val="146000"/>
-              </a:lnSpc>
-            </a:pPr>
-            <a:r>
-              <a:rPr sz="2100" b="0">
-                <a:solidFill>
-                  <a:srgbClr val="3D3D3D"/>
-                </a:solidFill>
-                <a:latin typeface="Pretendard"/>
-                <a:ea typeface="Pretendard"/>
-                <a:cs typeface="Pretendard"/>
-              </a:rPr>
-              <a:t>mysql-cdc 제거</a:t>
-            </a:r>
-          </a:p>
-        </p:txBody>
-      </p:sp>
-      <p:sp>
-        <p:nvSpPr>
-          <p:cNvPr id="13" name="Rounded Rectangle 12"/>
-          <p:cNvSpPr/>
-          <p:nvPr/>
-        </p:nvSpPr>
-        <p:spPr>
-          <a:xfrm>
-            <a:off x="4419600" y="3924300"/>
-            <a:ext cx="2895600" cy="3143250"/>
+              <a:t>"amount": "12000.00" — 사람이 읽는 값</a:t>
+            </a:r>
+          </a:p>
+        </p:txBody>
+      </p:sp>
+      <p:sp>
+        <p:nvSpPr>
+          <p:cNvPr id="19" name="Rounded Rectangle 18"/>
+          <p:cNvSpPr/>
+          <p:nvPr/>
+        </p:nvSpPr>
+        <p:spPr>
+          <a:xfrm>
+            <a:off x="9772650" y="4610100"/>
+            <a:ext cx="7372350" cy="2857500"/>
           </a:xfrm>
           <a:prstGeom prst="roundRect">
             <a:avLst>
-              <a:gd name="adj" fmla="val 1644"/>
+              <a:gd name="adj" fmla="val 1666"/>
             </a:avLst>
           </a:prstGeom>
           <a:solidFill>
@@ -12296,16 +13933,16 @@
       </p:sp>
       <p:sp>
         <p:nvSpPr>
-          <p:cNvPr id="14" name="Rectangle 13"/>
-          <p:cNvSpPr/>
-          <p:nvPr/>
-        </p:nvSpPr>
-        <p:spPr>
-          <a:xfrm>
-            <a:off x="4419600" y="3924300"/>
-            <a:ext cx="2895600" cy="914400"/>
-          </a:xfrm>
-          <a:prstGeom prst="rect">
+          <p:cNvPr id="20" name="Oval 19"/>
+          <p:cNvSpPr/>
+          <p:nvPr/>
+        </p:nvSpPr>
+        <p:spPr>
+          <a:xfrm>
+            <a:off x="10077450" y="5016817"/>
+            <a:ext cx="97155" cy="97155"/>
+          </a:xfrm>
+          <a:prstGeom prst="ellipse">
             <a:avLst/>
           </a:prstGeom>
           <a:solidFill>
@@ -12326,74 +13963,33 @@
       </p:sp>
       <p:sp>
         <p:nvSpPr>
-          <p:cNvPr id="15" name="TextBox 14"/>
-          <p:cNvSpPr txBox="1"/>
-          <p:nvPr/>
-        </p:nvSpPr>
-        <p:spPr>
-          <a:xfrm>
-            <a:off x="4419600" y="4171950"/>
-            <a:ext cx="2895600" cy="419100"/>
-          </a:xfrm>
-          <a:prstGeom prst="rect">
-            <a:avLst/>
-          </a:prstGeom>
-          <a:noFill/>
-        </p:spPr>
-        <p:txBody>
-          <a:bodyPr wrap="square" lIns="0" rIns="0" tIns="0" bIns="0" anchor="t">
-            <a:spAutoFit/>
-          </a:bodyPr>
-          <a:lstStyle/>
-          <a:p>
-            <a:pPr algn="ctr">
-              <a:lnSpc>
-                <a:spcPct val="100000"/>
-              </a:lnSpc>
-            </a:pPr>
-            <a:r>
-              <a:rPr sz="2475" b="1">
-                <a:solidFill>
-                  <a:srgbClr val="FFFFFF"/>
-                </a:solidFill>
-                <a:latin typeface="Pretendard"/>
-                <a:ea typeface="Pretendard"/>
-                <a:cs typeface="Pretendard"/>
-              </a:rPr>
-              <a:t>JSON 수정</a:t>
-            </a:r>
-          </a:p>
-        </p:txBody>
-      </p:sp>
-      <p:sp>
-        <p:nvSpPr>
-          <p:cNvPr id="16" name="TextBox 15"/>
-          <p:cNvSpPr txBox="1"/>
-          <p:nvPr/>
-        </p:nvSpPr>
-        <p:spPr>
-          <a:xfrm>
-            <a:off x="4629150" y="5143500"/>
-            <a:ext cx="2476500" cy="1524000"/>
-          </a:xfrm>
-          <a:prstGeom prst="rect">
-            <a:avLst/>
-          </a:prstGeom>
-          <a:noFill/>
-        </p:spPr>
-        <p:txBody>
-          <a:bodyPr wrap="square" lIns="0" rIns="0" tIns="0" bIns="0" anchor="t">
-            <a:spAutoFit/>
-          </a:bodyPr>
-          <a:lstStyle/>
-          <a:p>
-            <a:pPr algn="ctr">
-              <a:lnSpc>
-                <a:spcPct val="146000"/>
-              </a:lnSpc>
-            </a:pPr>
-            <a:r>
-              <a:rPr sz="2100" b="0">
+          <p:cNvPr id="21" name="TextBox 20"/>
+          <p:cNvSpPr txBox="1"/>
+          <p:nvPr/>
+        </p:nvSpPr>
+        <p:spPr>
+          <a:xfrm>
+            <a:off x="10263188" y="4838700"/>
+            <a:ext cx="6634162" cy="453390"/>
+          </a:xfrm>
+          <a:prstGeom prst="rect">
+            <a:avLst/>
+          </a:prstGeom>
+          <a:noFill/>
+        </p:spPr>
+        <p:txBody>
+          <a:bodyPr wrap="square" lIns="0" rIns="0" tIns="0" bIns="0" anchor="ctr">
+            <a:spAutoFit/>
+          </a:bodyPr>
+          <a:lstStyle/>
+          <a:p>
+            <a:pPr algn="l">
+              <a:lnSpc>
+                <a:spcPct val="120000"/>
+              </a:lnSpc>
+            </a:pPr>
+            <a:r>
+              <a:rPr sz="1575" b="0">
                 <a:solidFill>
                   <a:srgbClr val="3D3D3D"/>
                 </a:solidFill>
@@ -12401,79 +13997,27 @@
                 <a:ea typeface="Pretendard"/>
                 <a:cs typeface="Pretendard"/>
               </a:rPr>
-              <a:t>database.hostname</a:t>
-            </a:r>
-          </a:p>
-          <a:p>
-            <a:pPr algn="ctr">
-              <a:lnSpc>
-                <a:spcPct val="146000"/>
-              </a:lnSpc>
-            </a:pPr>
-            <a:r>
-              <a:rPr sz="2100" b="0">
-                <a:solidFill>
-                  <a:srgbClr val="3D3D3D"/>
-                </a:solidFill>
-                <a:latin typeface="Pretendard"/>
-                <a:ea typeface="Pretendard"/>
-                <a:cs typeface="Pretendard"/>
-              </a:rPr>
-              <a:t>→ localhost</a:t>
-            </a:r>
-          </a:p>
-        </p:txBody>
-      </p:sp>
-      <p:sp>
-        <p:nvSpPr>
-          <p:cNvPr id="17" name="Rounded Rectangle 16"/>
-          <p:cNvSpPr/>
-          <p:nvPr/>
-        </p:nvSpPr>
-        <p:spPr>
-          <a:xfrm>
-            <a:off x="7696200" y="3924300"/>
-            <a:ext cx="2895600" cy="3143250"/>
-          </a:xfrm>
-          <a:prstGeom prst="roundRect">
-            <a:avLst>
-              <a:gd name="adj" fmla="val 1644"/>
-            </a:avLst>
-          </a:prstGeom>
-          <a:solidFill>
-            <a:srgbClr val="FAFBFD"/>
-          </a:solidFill>
-          <a:ln w="9525">
-            <a:solidFill>
-              <a:srgbClr val="DCE1E8"/>
-            </a:solidFill>
-          </a:ln>
-          <a:effectLst/>
-        </p:spPr>
-        <p:txBody>
-          <a:bodyPr rtlCol="0" anchor="ctr" wrap="square"/>
-          <a:lstStyle/>
-          <a:p>
-            <a:pPr algn="ctr"/>
-          </a:p>
-        </p:txBody>
-      </p:sp>
-      <p:sp>
-        <p:nvSpPr>
-          <p:cNvPr id="18" name="Rectangle 17"/>
-          <p:cNvSpPr/>
-          <p:nvPr/>
-        </p:nvSpPr>
-        <p:spPr>
-          <a:xfrm>
-            <a:off x="7696200" y="3924300"/>
-            <a:ext cx="2895600" cy="914400"/>
-          </a:xfrm>
-          <a:prstGeom prst="rect">
-            <a:avLst/>
-          </a:prstGeom>
-          <a:solidFill>
-            <a:srgbClr val="0D2B5E"/>
+              <a:t>after 의 amount 를 바로 읽는다</a:t>
+            </a:r>
+          </a:p>
+        </p:txBody>
+      </p:sp>
+      <p:sp>
+        <p:nvSpPr>
+          <p:cNvPr id="22" name="Oval 21"/>
+          <p:cNvSpPr/>
+          <p:nvPr/>
+        </p:nvSpPr>
+        <p:spPr>
+          <a:xfrm>
+            <a:off x="10077450" y="5527358"/>
+            <a:ext cx="97155" cy="97155"/>
+          </a:xfrm>
+          <a:prstGeom prst="ellipse">
+            <a:avLst/>
+          </a:prstGeom>
+          <a:solidFill>
+            <a:srgbClr val="1E5BC6"/>
           </a:solidFill>
           <a:ln>
             <a:noFill/>
@@ -12490,74 +14034,33 @@
       </p:sp>
       <p:sp>
         <p:nvSpPr>
-          <p:cNvPr id="19" name="TextBox 18"/>
-          <p:cNvSpPr txBox="1"/>
-          <p:nvPr/>
-        </p:nvSpPr>
-        <p:spPr>
-          <a:xfrm>
-            <a:off x="7696200" y="4171950"/>
-            <a:ext cx="2895600" cy="419100"/>
-          </a:xfrm>
-          <a:prstGeom prst="rect">
-            <a:avLst/>
-          </a:prstGeom>
-          <a:noFill/>
-        </p:spPr>
-        <p:txBody>
-          <a:bodyPr wrap="square" lIns="0" rIns="0" tIns="0" bIns="0" anchor="t">
-            <a:spAutoFit/>
-          </a:bodyPr>
-          <a:lstStyle/>
-          <a:p>
-            <a:pPr algn="ctr">
-              <a:lnSpc>
-                <a:spcPct val="100000"/>
-              </a:lnSpc>
-            </a:pPr>
-            <a:r>
-              <a:rPr sz="2475" b="1">
-                <a:solidFill>
-                  <a:srgbClr val="FFFFFF"/>
-                </a:solidFill>
-                <a:latin typeface="Pretendard"/>
-                <a:ea typeface="Pretendard"/>
-                <a:cs typeface="Pretendard"/>
-              </a:rPr>
-              <a:t>재등록</a:t>
-            </a:r>
-          </a:p>
-        </p:txBody>
-      </p:sp>
-      <p:sp>
-        <p:nvSpPr>
-          <p:cNvPr id="20" name="TextBox 19"/>
-          <p:cNvSpPr txBox="1"/>
-          <p:nvPr/>
-        </p:nvSpPr>
-        <p:spPr>
-          <a:xfrm>
-            <a:off x="7905750" y="5143500"/>
-            <a:ext cx="2476500" cy="1524000"/>
-          </a:xfrm>
-          <a:prstGeom prst="rect">
-            <a:avLst/>
-          </a:prstGeom>
-          <a:noFill/>
-        </p:spPr>
-        <p:txBody>
-          <a:bodyPr wrap="square" lIns="0" rIns="0" tIns="0" bIns="0" anchor="t">
-            <a:spAutoFit/>
-          </a:bodyPr>
-          <a:lstStyle/>
-          <a:p>
-            <a:pPr algn="ctr">
-              <a:lnSpc>
-                <a:spcPct val="146000"/>
-              </a:lnSpc>
-            </a:pPr>
-            <a:r>
-              <a:rPr sz="2100" b="0">
+          <p:cNvPr id="23" name="TextBox 22"/>
+          <p:cNvSpPr txBox="1"/>
+          <p:nvPr/>
+        </p:nvSpPr>
+        <p:spPr>
+          <a:xfrm>
+            <a:off x="10263188" y="5349240"/>
+            <a:ext cx="6634162" cy="453390"/>
+          </a:xfrm>
+          <a:prstGeom prst="rect">
+            <a:avLst/>
+          </a:prstGeom>
+          <a:noFill/>
+        </p:spPr>
+        <p:txBody>
+          <a:bodyPr wrap="square" lIns="0" rIns="0" tIns="0" bIns="0" anchor="ctr">
+            <a:spAutoFit/>
+          </a:bodyPr>
+          <a:lstStyle/>
+          <a:p>
+            <a:pPr algn="l">
+              <a:lnSpc>
+                <a:spcPct val="120000"/>
+              </a:lnSpc>
+            </a:pPr>
+            <a:r>
+              <a:rPr sz="1575" b="0">
                 <a:solidFill>
                   <a:srgbClr val="3D3D3D"/>
                 </a:solidFill>
@@ -12565,75 +14068,23 @@
                 <a:ea typeface="Pretendard"/>
                 <a:cs typeface="Pretendard"/>
               </a:rPr>
-              <a:t>POST 뒤</a:t>
-            </a:r>
-          </a:p>
-          <a:p>
-            <a:pPr algn="ctr">
-              <a:lnSpc>
-                <a:spcPct val="146000"/>
-              </a:lnSpc>
-            </a:pPr>
-            <a:r>
-              <a:rPr sz="2100" b="0">
-                <a:solidFill>
-                  <a:srgbClr val="3D3D3D"/>
-                </a:solidFill>
-                <a:latin typeface="Pretendard"/>
-                <a:ea typeface="Pretendard"/>
-                <a:cs typeface="Pretendard"/>
-              </a:rPr>
-              <a:t>status 확인</a:t>
-            </a:r>
-          </a:p>
-        </p:txBody>
-      </p:sp>
-      <p:sp>
-        <p:nvSpPr>
-          <p:cNvPr id="21" name="Rounded Rectangle 20"/>
-          <p:cNvSpPr/>
-          <p:nvPr/>
-        </p:nvSpPr>
-        <p:spPr>
-          <a:xfrm>
-            <a:off x="10972800" y="3924300"/>
-            <a:ext cx="2895600" cy="3143250"/>
-          </a:xfrm>
-          <a:prstGeom prst="roundRect">
-            <a:avLst>
-              <a:gd name="adj" fmla="val 1644"/>
-            </a:avLst>
-          </a:prstGeom>
-          <a:solidFill>
-            <a:srgbClr val="FAFBFD"/>
-          </a:solidFill>
-          <a:ln w="9525">
-            <a:solidFill>
-              <a:srgbClr val="DCE1E8"/>
-            </a:solidFill>
-          </a:ln>
-          <a:effectLst/>
-        </p:spPr>
-        <p:txBody>
-          <a:bodyPr rtlCol="0" anchor="ctr" wrap="square"/>
-          <a:lstStyle/>
-          <a:p>
-            <a:pPr algn="ctr"/>
-          </a:p>
-        </p:txBody>
-      </p:sp>
-      <p:sp>
-        <p:nvSpPr>
-          <p:cNvPr id="22" name="Rectangle 21"/>
-          <p:cNvSpPr/>
-          <p:nvPr/>
-        </p:nvSpPr>
-        <p:spPr>
-          <a:xfrm>
-            <a:off x="10972800" y="3924300"/>
-            <a:ext cx="2895600" cy="914400"/>
-          </a:xfrm>
-          <a:prstGeom prst="rect">
+              <a:t>7단계 13200.00 · 10890.00 도 이 형태</a:t>
+            </a:r>
+          </a:p>
+        </p:txBody>
+      </p:sp>
+      <p:sp>
+        <p:nvSpPr>
+          <p:cNvPr id="24" name="Oval 23"/>
+          <p:cNvSpPr/>
+          <p:nvPr/>
+        </p:nvSpPr>
+        <p:spPr>
+          <a:xfrm>
+            <a:off x="10077450" y="6037898"/>
+            <a:ext cx="97155" cy="97155"/>
+          </a:xfrm>
+          <a:prstGeom prst="ellipse">
             <a:avLst/>
           </a:prstGeom>
           <a:solidFill>
@@ -12654,74 +14105,33 @@
       </p:sp>
       <p:sp>
         <p:nvSpPr>
-          <p:cNvPr id="23" name="TextBox 22"/>
-          <p:cNvSpPr txBox="1"/>
-          <p:nvPr/>
-        </p:nvSpPr>
-        <p:spPr>
-          <a:xfrm>
-            <a:off x="10972800" y="4171950"/>
-            <a:ext cx="2895600" cy="419100"/>
-          </a:xfrm>
-          <a:prstGeom prst="rect">
-            <a:avLst/>
-          </a:prstGeom>
-          <a:noFill/>
-        </p:spPr>
-        <p:txBody>
-          <a:bodyPr wrap="square" lIns="0" rIns="0" tIns="0" bIns="0" anchor="t">
-            <a:spAutoFit/>
-          </a:bodyPr>
-          <a:lstStyle/>
-          <a:p>
-            <a:pPr algn="ctr">
-              <a:lnSpc>
-                <a:spcPct val="100000"/>
-              </a:lnSpc>
-            </a:pPr>
-            <a:r>
-              <a:rPr sz="2475" b="1">
-                <a:solidFill>
-                  <a:srgbClr val="FFFFFF"/>
-                </a:solidFill>
-                <a:latin typeface="Pretendard"/>
-                <a:ea typeface="Pretendard"/>
-                <a:cs typeface="Pretendard"/>
-              </a:rPr>
-              <a:t>FAILED</a:t>
-            </a:r>
-          </a:p>
-        </p:txBody>
-      </p:sp>
-      <p:sp>
-        <p:nvSpPr>
-          <p:cNvPr id="24" name="TextBox 23"/>
-          <p:cNvSpPr txBox="1"/>
-          <p:nvPr/>
-        </p:nvSpPr>
-        <p:spPr>
-          <a:xfrm>
-            <a:off x="11182350" y="5143500"/>
-            <a:ext cx="2476500" cy="1524000"/>
-          </a:xfrm>
-          <a:prstGeom prst="rect">
-            <a:avLst/>
-          </a:prstGeom>
-          <a:noFill/>
-        </p:spPr>
-        <p:txBody>
-          <a:bodyPr wrap="square" lIns="0" rIns="0" tIns="0" bIns="0" anchor="t">
-            <a:spAutoFit/>
-          </a:bodyPr>
-          <a:lstStyle/>
-          <a:p>
-            <a:pPr algn="ctr">
-              <a:lnSpc>
-                <a:spcPct val="146000"/>
-              </a:lnSpc>
-            </a:pPr>
-            <a:r>
-              <a:rPr sz="2100" b="0">
+          <p:cNvPr id="25" name="TextBox 24"/>
+          <p:cNvSpPr txBox="1"/>
+          <p:nvPr/>
+        </p:nvSpPr>
+        <p:spPr>
+          <a:xfrm>
+            <a:off x="10263188" y="5859780"/>
+            <a:ext cx="6634162" cy="453390"/>
+          </a:xfrm>
+          <a:prstGeom prst="rect">
+            <a:avLst/>
+          </a:prstGeom>
+          <a:noFill/>
+        </p:spPr>
+        <p:txBody>
+          <a:bodyPr wrap="square" lIns="0" rIns="0" tIns="0" bIns="0" anchor="ctr">
+            <a:spAutoFit/>
+          </a:bodyPr>
+          <a:lstStyle/>
+          <a:p>
+            <a:pPr algn="l">
+              <a:lnSpc>
+                <a:spcPct val="120000"/>
+              </a:lnSpc>
+            </a:pPr>
+            <a:r>
+              <a:rPr sz="1575" b="0">
                 <a:solidFill>
                   <a:srgbClr val="3D3D3D"/>
                 </a:solidFill>
@@ -12729,75 +14139,23 @@
                 <a:ea typeface="Pretendard"/>
                 <a:cs typeface="Pretendard"/>
               </a:rPr>
-              <a:t>trace 첫 줄</a:t>
-            </a:r>
-          </a:p>
-          <a:p>
-            <a:pPr algn="ctr">
-              <a:lnSpc>
-                <a:spcPct val="146000"/>
-              </a:lnSpc>
-            </a:pPr>
-            <a:r>
-              <a:rPr sz="2100" b="0">
-                <a:solidFill>
-                  <a:srgbClr val="3D3D3D"/>
-                </a:solidFill>
-                <a:latin typeface="Pretendard"/>
-                <a:ea typeface="Pretendard"/>
-                <a:cs typeface="Pretendard"/>
-              </a:rPr>
-              <a:t>접속 오류</a:t>
-            </a:r>
-          </a:p>
-        </p:txBody>
-      </p:sp>
-      <p:sp>
-        <p:nvSpPr>
-          <p:cNvPr id="25" name="Rounded Rectangle 24"/>
-          <p:cNvSpPr/>
-          <p:nvPr/>
-        </p:nvSpPr>
-        <p:spPr>
-          <a:xfrm>
-            <a:off x="14249400" y="3924300"/>
-            <a:ext cx="2895600" cy="3143250"/>
-          </a:xfrm>
-          <a:prstGeom prst="roundRect">
-            <a:avLst>
-              <a:gd name="adj" fmla="val 1644"/>
-            </a:avLst>
-          </a:prstGeom>
-          <a:solidFill>
-            <a:srgbClr val="FAFBFD"/>
-          </a:solidFill>
-          <a:ln w="9525">
-            <a:solidFill>
-              <a:srgbClr val="DCE1E8"/>
-            </a:solidFill>
-          </a:ln>
-          <a:effectLst/>
-        </p:spPr>
-        <p:txBody>
-          <a:bodyPr rtlCol="0" anchor="ctr" wrap="square"/>
-          <a:lstStyle/>
-          <a:p>
-            <a:pPr algn="ctr"/>
-          </a:p>
-        </p:txBody>
-      </p:sp>
-      <p:sp>
-        <p:nvSpPr>
-          <p:cNvPr id="26" name="Rectangle 25"/>
-          <p:cNvSpPr/>
-          <p:nvPr/>
-        </p:nvSpPr>
-        <p:spPr>
-          <a:xfrm>
-            <a:off x="14249400" y="3924300"/>
-            <a:ext cx="2895600" cy="914400"/>
-          </a:xfrm>
-          <a:prstGeom prst="rect">
+              <a:t>오늘 JSON 에는 넣어 둔 채로 등록</a:t>
+            </a:r>
+          </a:p>
+        </p:txBody>
+      </p:sp>
+      <p:sp>
+        <p:nvSpPr>
+          <p:cNvPr id="26" name="Oval 25"/>
+          <p:cNvSpPr/>
+          <p:nvPr/>
+        </p:nvSpPr>
+        <p:spPr>
+          <a:xfrm>
+            <a:off x="8686800" y="3771900"/>
+            <a:ext cx="914400" cy="914400"/>
+          </a:xfrm>
+          <a:prstGeom prst="ellipse">
             <a:avLst/>
           </a:prstGeom>
           <a:solidFill>
@@ -12824,8 +14182,8 @@
         </p:nvSpPr>
         <p:spPr>
           <a:xfrm>
-            <a:off x="14249400" y="4171950"/>
-            <a:ext cx="2895600" cy="419100"/>
+            <a:off x="8686800" y="4057650"/>
+            <a:ext cx="914400" cy="381000"/>
           </a:xfrm>
           <a:prstGeom prst="rect">
             <a:avLst/>
@@ -12844,7 +14202,7 @@
               </a:lnSpc>
             </a:pPr>
             <a:r>
-              <a:rPr sz="2475" b="1">
+              <a:rPr sz="2250" b="1">
                 <a:solidFill>
                   <a:srgbClr val="FFFFFF"/>
                 </a:solidFill>
@@ -12852,73 +14210,14 @@
                 <a:ea typeface="Pretendard"/>
                 <a:cs typeface="Pretendard"/>
               </a:rPr>
-              <a:t>복구</a:t>
-            </a:r>
-          </a:p>
-        </p:txBody>
-      </p:sp>
-      <p:sp>
-        <p:nvSpPr>
-          <p:cNvPr id="28" name="TextBox 27"/>
-          <p:cNvSpPr txBox="1"/>
-          <p:nvPr/>
-        </p:nvSpPr>
-        <p:spPr>
-          <a:xfrm>
-            <a:off x="14458950" y="5143500"/>
-            <a:ext cx="2476500" cy="1524000"/>
-          </a:xfrm>
-          <a:prstGeom prst="rect">
-            <a:avLst/>
-          </a:prstGeom>
-          <a:noFill/>
-        </p:spPr>
-        <p:txBody>
-          <a:bodyPr wrap="square" lIns="0" rIns="0" tIns="0" bIns="0" anchor="t">
-            <a:spAutoFit/>
-          </a:bodyPr>
-          <a:lstStyle/>
-          <a:p>
-            <a:pPr algn="ctr">
-              <a:lnSpc>
-                <a:spcPct val="146000"/>
-              </a:lnSpc>
-            </a:pPr>
-            <a:r>
-              <a:rPr sz="2100" b="0">
-                <a:solidFill>
-                  <a:srgbClr val="3D3D3D"/>
-                </a:solidFill>
-                <a:latin typeface="Pretendard"/>
-                <a:ea typeface="Pretendard"/>
-                <a:cs typeface="Pretendard"/>
-              </a:rPr>
-              <a:t>mysql 로 고쳐</a:t>
-            </a:r>
-          </a:p>
-          <a:p>
-            <a:pPr algn="ctr">
-              <a:lnSpc>
-                <a:spcPct val="146000"/>
-              </a:lnSpc>
-            </a:pPr>
-            <a:r>
-              <a:rPr sz="2100" b="0">
-                <a:solidFill>
-                  <a:srgbClr val="3D3D3D"/>
-                </a:solidFill>
-                <a:latin typeface="Pretendard"/>
-                <a:ea typeface="Pretendard"/>
-                <a:cs typeface="Pretendard"/>
-              </a:rPr>
-              <a:t>삭제 → 재등록</a:t>
-            </a:r>
-          </a:p>
-        </p:txBody>
-      </p:sp>
-      <p:sp>
-        <p:nvSpPr>
-          <p:cNvPr id="29" name="Rectangle 28"/>
+              <a:t>VS</a:t>
+            </a:r>
+          </a:p>
+        </p:txBody>
+      </p:sp>
+      <p:sp>
+        <p:nvSpPr>
+          <p:cNvPr id="28" name="Rectangle 27"/>
           <p:cNvSpPr/>
           <p:nvPr/>
         </p:nvSpPr>
@@ -12948,7 +14247,7 @@
       </p:sp>
       <p:sp>
         <p:nvSpPr>
-          <p:cNvPr id="30" name="TextBox 29"/>
+          <p:cNvPr id="29" name="TextBox 28"/>
           <p:cNvSpPr txBox="1"/>
           <p:nvPr/>
         </p:nvSpPr>
@@ -12989,7 +14288,7 @@
       </p:sp>
       <p:sp>
         <p:nvSpPr>
-          <p:cNvPr id="31" name="TextBox 30"/>
+          <p:cNvPr id="30" name="TextBox 29"/>
           <p:cNvSpPr txBox="1"/>
           <p:nvPr/>
         </p:nvSpPr>
@@ -13048,7 +14347,7 @@
       <p:grpSpPr/>
       <p:sp>
         <p:nvSpPr>
-          <p:cNvPr id="2" name="Oval 1"/>
+          <p:cNvPr id="2" name="deckgen:decor"/>
           <p:cNvSpPr/>
           <p:nvPr/>
         </p:nvSpPr>
@@ -13078,7 +14377,7 @@
       </p:sp>
       <p:sp>
         <p:nvSpPr>
-          <p:cNvPr id="3" name="Oval 2"/>
+          <p:cNvPr id="3" name="deckgen:decor"/>
           <p:cNvSpPr/>
           <p:nvPr/>
         </p:nvSpPr>
@@ -13108,7 +14407,7 @@
       </p:sp>
       <p:sp>
         <p:nvSpPr>
-          <p:cNvPr id="4" name="Oval 3"/>
+          <p:cNvPr id="4" name="deckgen:decor"/>
           <p:cNvSpPr/>
           <p:nvPr/>
         </p:nvSpPr>
@@ -14770,7 +16069,307 @@
       </p:sp>
       <p:sp>
         <p:nvSpPr>
-          <p:cNvPr id="48" name="TextBox 47"/>
+          <p:cNvPr id="48" name="Rounded Rectangle 47"/>
+          <p:cNvSpPr/>
+          <p:nvPr/>
+        </p:nvSpPr>
+        <p:spPr>
+          <a:xfrm>
+            <a:off x="1143000" y="6343650"/>
+            <a:ext cx="6042660" cy="647700"/>
+          </a:xfrm>
+          <a:prstGeom prst="roundRect">
+            <a:avLst>
+              <a:gd name="adj" fmla="val 5882"/>
+            </a:avLst>
+          </a:prstGeom>
+          <a:solidFill>
+            <a:srgbClr val="EDF3FD"/>
+          </a:solidFill>
+          <a:ln w="9525">
+            <a:solidFill>
+              <a:srgbClr val="BFD3F5"/>
+            </a:solidFill>
+          </a:ln>
+          <a:effectLst/>
+        </p:spPr>
+        <p:txBody>
+          <a:bodyPr rtlCol="0" anchor="ctr" wrap="square"/>
+          <a:lstStyle/>
+          <a:p>
+            <a:pPr algn="ctr"/>
+          </a:p>
+        </p:txBody>
+      </p:sp>
+      <p:sp>
+        <p:nvSpPr>
+          <p:cNvPr id="49" name="TextBox 48"/>
+          <p:cNvSpPr txBox="1"/>
+          <p:nvPr/>
+        </p:nvSpPr>
+        <p:spPr>
+          <a:xfrm>
+            <a:off x="1238250" y="6343650"/>
+            <a:ext cx="5852160" cy="647700"/>
+          </a:xfrm>
+          <a:prstGeom prst="rect">
+            <a:avLst/>
+          </a:prstGeom>
+          <a:noFill/>
+        </p:spPr>
+        <p:txBody>
+          <a:bodyPr wrap="square" lIns="0" rIns="0" tIns="0" bIns="0" anchor="ctr">
+            <a:spAutoFit/>
+          </a:bodyPr>
+          <a:lstStyle/>
+          <a:p>
+            <a:pPr algn="l">
+              <a:lnSpc>
+                <a:spcPct val="115000"/>
+              </a:lnSpc>
+            </a:pPr>
+            <a:r>
+              <a:rPr sz="1875" b="1">
+                <a:solidFill>
+                  <a:srgbClr val="0D2B5E"/>
+                </a:solidFill>
+                <a:latin typeface="Pretendard"/>
+                <a:ea typeface="Pretendard"/>
+                <a:cs typeface="Pretendard"/>
+              </a:rPr>
+              <a:t>DELETE 뒤 한 줄 더</a:t>
+            </a:r>
+          </a:p>
+        </p:txBody>
+      </p:sp>
+      <p:sp>
+        <p:nvSpPr>
+          <p:cNvPr id="50" name="Rounded Rectangle 49"/>
+          <p:cNvSpPr/>
+          <p:nvPr/>
+        </p:nvSpPr>
+        <p:spPr>
+          <a:xfrm>
+            <a:off x="7223760" y="6343650"/>
+            <a:ext cx="1882140" cy="647700"/>
+          </a:xfrm>
+          <a:prstGeom prst="roundRect">
+            <a:avLst>
+              <a:gd name="adj" fmla="val 5882"/>
+            </a:avLst>
+          </a:prstGeom>
+          <a:solidFill>
+            <a:srgbClr val="FAFBFD"/>
+          </a:solidFill>
+          <a:ln w="9525">
+            <a:solidFill>
+              <a:srgbClr val="DCE1E8"/>
+            </a:solidFill>
+          </a:ln>
+          <a:effectLst/>
+        </p:spPr>
+        <p:txBody>
+          <a:bodyPr rtlCol="0" anchor="ctr" wrap="square"/>
+          <a:lstStyle/>
+          <a:p>
+            <a:pPr algn="ctr"/>
+          </a:p>
+        </p:txBody>
+      </p:sp>
+      <p:sp>
+        <p:nvSpPr>
+          <p:cNvPr id="51" name="TextBox 50"/>
+          <p:cNvSpPr txBox="1"/>
+          <p:nvPr/>
+        </p:nvSpPr>
+        <p:spPr>
+          <a:xfrm>
+            <a:off x="7319010" y="6343650"/>
+            <a:ext cx="1691640" cy="647700"/>
+          </a:xfrm>
+          <a:prstGeom prst="rect">
+            <a:avLst/>
+          </a:prstGeom>
+          <a:noFill/>
+        </p:spPr>
+        <p:txBody>
+          <a:bodyPr wrap="square" lIns="0" rIns="0" tIns="0" bIns="0" anchor="ctr">
+            <a:spAutoFit/>
+          </a:bodyPr>
+          <a:lstStyle/>
+          <a:p>
+            <a:pPr algn="ctr">
+              <a:lnSpc>
+                <a:spcPct val="115000"/>
+              </a:lnSpc>
+            </a:pPr>
+            <a:r>
+              <a:rPr sz="1875" b="0">
+                <a:solidFill>
+                  <a:srgbClr val="3D3D3D"/>
+                </a:solidFill>
+                <a:latin typeface="Pretendard"/>
+                <a:ea typeface="Pretendard"/>
+                <a:cs typeface="Pretendard"/>
+              </a:rPr>
+              <a:t>—</a:t>
+            </a:r>
+          </a:p>
+        </p:txBody>
+      </p:sp>
+      <p:sp>
+        <p:nvSpPr>
+          <p:cNvPr id="52" name="Rounded Rectangle 51"/>
+          <p:cNvSpPr/>
+          <p:nvPr/>
+        </p:nvSpPr>
+        <p:spPr>
+          <a:xfrm>
+            <a:off x="9144000" y="6343650"/>
+            <a:ext cx="3962400" cy="647700"/>
+          </a:xfrm>
+          <a:prstGeom prst="roundRect">
+            <a:avLst>
+              <a:gd name="adj" fmla="val 5882"/>
+            </a:avLst>
+          </a:prstGeom>
+          <a:solidFill>
+            <a:srgbClr val="FAFBFD"/>
+          </a:solidFill>
+          <a:ln w="9525">
+            <a:solidFill>
+              <a:srgbClr val="DCE1E8"/>
+            </a:solidFill>
+          </a:ln>
+          <a:effectLst/>
+        </p:spPr>
+        <p:txBody>
+          <a:bodyPr rtlCol="0" anchor="ctr" wrap="square"/>
+          <a:lstStyle/>
+          <a:p>
+            <a:pPr algn="ctr"/>
+          </a:p>
+        </p:txBody>
+      </p:sp>
+      <p:sp>
+        <p:nvSpPr>
+          <p:cNvPr id="53" name="TextBox 52"/>
+          <p:cNvSpPr txBox="1"/>
+          <p:nvPr/>
+        </p:nvSpPr>
+        <p:spPr>
+          <a:xfrm>
+            <a:off x="9239250" y="6343650"/>
+            <a:ext cx="3771900" cy="647700"/>
+          </a:xfrm>
+          <a:prstGeom prst="rect">
+            <a:avLst/>
+          </a:prstGeom>
+          <a:noFill/>
+        </p:spPr>
+        <p:txBody>
+          <a:bodyPr wrap="square" lIns="0" rIns="0" tIns="0" bIns="0" anchor="ctr">
+            <a:spAutoFit/>
+          </a:bodyPr>
+          <a:lstStyle/>
+          <a:p>
+            <a:pPr algn="ctr">
+              <a:lnSpc>
+                <a:spcPct val="115000"/>
+              </a:lnSpc>
+            </a:pPr>
+            <a:r>
+              <a:rPr sz="1875" b="0">
+                <a:solidFill>
+                  <a:srgbClr val="3D3D3D"/>
+                </a:solidFill>
+                <a:latin typeface="Pretendard"/>
+                <a:ea typeface="Pretendard"/>
+                <a:cs typeface="Pretendard"/>
+              </a:rPr>
+              <a:t>툼스톤</a:t>
+            </a:r>
+          </a:p>
+        </p:txBody>
+      </p:sp>
+      <p:sp>
+        <p:nvSpPr>
+          <p:cNvPr id="54" name="Rounded Rectangle 53"/>
+          <p:cNvSpPr/>
+          <p:nvPr/>
+        </p:nvSpPr>
+        <p:spPr>
+          <a:xfrm>
+            <a:off x="13144500" y="6343650"/>
+            <a:ext cx="4000500" cy="647700"/>
+          </a:xfrm>
+          <a:prstGeom prst="roundRect">
+            <a:avLst>
+              <a:gd name="adj" fmla="val 5882"/>
+            </a:avLst>
+          </a:prstGeom>
+          <a:solidFill>
+            <a:srgbClr val="FAFBFD"/>
+          </a:solidFill>
+          <a:ln w="9525">
+            <a:solidFill>
+              <a:srgbClr val="DCE1E8"/>
+            </a:solidFill>
+          </a:ln>
+          <a:effectLst/>
+        </p:spPr>
+        <p:txBody>
+          <a:bodyPr rtlCol="0" anchor="ctr" wrap="square"/>
+          <a:lstStyle/>
+          <a:p>
+            <a:pPr algn="ctr"/>
+          </a:p>
+        </p:txBody>
+      </p:sp>
+      <p:sp>
+        <p:nvSpPr>
+          <p:cNvPr id="55" name="TextBox 54"/>
+          <p:cNvSpPr txBox="1"/>
+          <p:nvPr/>
+        </p:nvSpPr>
+        <p:spPr>
+          <a:xfrm>
+            <a:off x="13239750" y="6343650"/>
+            <a:ext cx="3810000" cy="647700"/>
+          </a:xfrm>
+          <a:prstGeom prst="rect">
+            <a:avLst/>
+          </a:prstGeom>
+          <a:noFill/>
+        </p:spPr>
+        <p:txBody>
+          <a:bodyPr wrap="square" lIns="0" rIns="0" tIns="0" bIns="0" anchor="ctr">
+            <a:spAutoFit/>
+          </a:bodyPr>
+          <a:lstStyle/>
+          <a:p>
+            <a:pPr algn="ctr">
+              <a:lnSpc>
+                <a:spcPct val="115000"/>
+              </a:lnSpc>
+            </a:pPr>
+            <a:r>
+              <a:rPr sz="1875" b="0">
+                <a:solidFill>
+                  <a:srgbClr val="3D3D3D"/>
+                </a:solidFill>
+                <a:latin typeface="Pretendard"/>
+                <a:ea typeface="Pretendard"/>
+                <a:cs typeface="Pretendard"/>
+              </a:rPr>
+              <a:t>null(값 없음)</a:t>
+            </a:r>
+          </a:p>
+        </p:txBody>
+      </p:sp>
+      <p:sp>
+        <p:nvSpPr>
+          <p:cNvPr id="56" name="TextBox 55"/>
           <p:cNvSpPr txBox="1"/>
           <p:nvPr/>
         </p:nvSpPr>
@@ -14804,14 +16403,14 @@
                 <a:ea typeface="Pretendard"/>
                 <a:cs typeface="Pretendard"/>
               </a:rPr>
-              <a:t>터미널 1: kafka-console-consumer --topic shop.shop.orders 를 켜 둔 채, 터미널 2 에서 한 줄씩 실행하며 대조</a:t>
-            </a:r>
-          </a:p>
-        </p:txBody>
-      </p:sp>
-      <p:sp>
-        <p:nvSpPr>
-          <p:cNvPr id="49" name="Rectangle 48"/>
+              <a:t>터미널 1 에 consumer 를 켜 둔 채 터미널 2 에서 한 줄씩 — 스냅숏 줄은 3KB 쯤, 끝 쪽 payload 에서 op 를 찾는다</a:t>
+            </a:r>
+          </a:p>
+        </p:txBody>
+      </p:sp>
+      <p:sp>
+        <p:nvSpPr>
+          <p:cNvPr id="57" name="Rectangle 56"/>
           <p:cNvSpPr/>
           <p:nvPr/>
         </p:nvSpPr>
@@ -14841,7 +16440,7 @@
       </p:sp>
       <p:sp>
         <p:nvSpPr>
-          <p:cNvPr id="50" name="TextBox 49"/>
+          <p:cNvPr id="58" name="TextBox 57"/>
           <p:cNvSpPr txBox="1"/>
           <p:nvPr/>
         </p:nvSpPr>
@@ -14882,7 +16481,7 @@
       </p:sp>
       <p:sp>
         <p:nvSpPr>
-          <p:cNvPr id="51" name="TextBox 50"/>
+          <p:cNvPr id="59" name="TextBox 58"/>
           <p:cNvSpPr txBox="1"/>
           <p:nvPr/>
         </p:nvSpPr>
@@ -14941,7 +16540,7 @@
       <p:grpSpPr/>
       <p:sp>
         <p:nvSpPr>
-          <p:cNvPr id="2" name="Oval 1"/>
+          <p:cNvPr id="2" name="deckgen:decor"/>
           <p:cNvSpPr/>
           <p:nvPr/>
         </p:nvSpPr>
@@ -14971,7 +16570,7 @@
       </p:sp>
       <p:sp>
         <p:nvSpPr>
-          <p:cNvPr id="3" name="Oval 2"/>
+          <p:cNvPr id="3" name="deckgen:decor"/>
           <p:cNvSpPr/>
           <p:nvPr/>
         </p:nvSpPr>
@@ -15001,7 +16600,7 @@
       </p:sp>
       <p:sp>
         <p:nvSpPr>
-          <p:cNvPr id="4" name="Oval 3"/>
+          <p:cNvPr id="4" name="deckgen:decor"/>
           <p:cNvSpPr/>
           <p:nvPr/>
         </p:nvSpPr>
@@ -15510,7 +17109,7 @@
                 <a:ea typeface="Pretendard"/>
                 <a:cs typeface="Pretendard"/>
               </a:rPr>
-              <a:t>OP = {r: 스냅숏, c: INSERT, u: UPDATE, d: DELETE} 로 사람이 읽기 좋게</a:t>
+              <a:t>OP = {r: 스냅숏, c: INSERT, u: UPDATE, d: DELETE} · 값이 없으면 [툼스톤] 으로</a:t>
             </a:r>
           </a:p>
         </p:txBody>
@@ -15697,7 +17296,7 @@
                 <a:ea typeface="Pretendard"/>
                 <a:cs typeface="Pretendard"/>
               </a:rPr>
-              <a:t>INSERT 2건 + UPDATE amount*1.1 → cdc_reader 에 즉시 나타난다</a:t>
+              <a:t>다시 켜면 INSERT 2 · UPDATE 4 — 앞에서 읽은 것은 안 나온다</a:t>
             </a:r>
           </a:p>
         </p:txBody>
